--- a/preview_v7/che/l-che-b2-u5-2.pptx
+++ b/preview_v7/che/l-che-b2-u5-2.pptx
@@ -3142,61 +3142,20 @@
       </p:sp>
       <p:sp>
         <p:nvSpPr>
-          <p:cNvPr id="3" name="TextBox 2"/>
-          <p:cNvSpPr txBox="1"/>
-          <p:nvPr/>
-        </p:nvSpPr>
-        <p:spPr>
-          <a:xfrm>
-            <a:off x="640080" y="640080"/>
-            <a:ext cx="10911535" cy="502920"/>
-          </a:xfrm>
-          <a:prstGeom prst="rect">
-            <a:avLst/>
-          </a:prstGeom>
-          <a:noFill/>
-        </p:spPr>
-        <p:txBody>
-          <a:bodyPr wrap="square" anchor="t" lIns="0" rIns="0" tIns="0" bIns="0">
-            <a:spAutoFit/>
-          </a:bodyPr>
-          <a:lstStyle/>
-          <a:p>
-            <a:pPr algn="l">
-              <a:spcAft>
-                <a:spcPts val="0"/>
-              </a:spcAft>
-            </a:pPr>
-            <a:r>
-              <a:rPr sz="1200" b="1">
-                <a:solidFill>
-                  <a:srgbClr val="B23A2A"/>
-                </a:solidFill>
-                <a:latin typeface="微软雅黑"/>
-                <a:ea typeface="微软雅黑"/>
-                <a:cs typeface="微软雅黑"/>
-              </a:rPr>
-              <a:t>化学 · 必修第二册 · 第5单元 化工生产中的重要非金属元素</a:t>
-            </a:r>
-          </a:p>
-        </p:txBody>
-      </p:sp>
-      <p:sp>
-        <p:nvSpPr>
-          <p:cNvPr id="4" name="Rectangle 3"/>
+          <p:cNvPr id="3" name="Rectangle 2"/>
           <p:cNvSpPr/>
           <p:nvPr/>
         </p:nvSpPr>
         <p:spPr>
           <a:xfrm>
-            <a:off x="640080" y="1207008"/>
-            <a:ext cx="822960" cy="30480"/>
+            <a:off x="8168335" y="0"/>
+            <a:ext cx="4023360" cy="6858000"/>
           </a:xfrm>
           <a:prstGeom prst="rect">
             <a:avLst/>
           </a:prstGeom>
           <a:solidFill>
-            <a:srgbClr val="B23A2A"/>
+            <a:srgbClr val="1C2A33"/>
           </a:solidFill>
           <a:ln>
             <a:noFill/>
@@ -3227,92 +3186,14 @@
       </p:sp>
       <p:sp>
         <p:nvSpPr>
-          <p:cNvPr id="5" name="TextBox 4"/>
-          <p:cNvSpPr txBox="1"/>
-          <p:nvPr/>
-        </p:nvSpPr>
-        <p:spPr>
-          <a:xfrm>
-            <a:off x="640080" y="1737360"/>
-            <a:ext cx="10911535" cy="2011680"/>
-          </a:xfrm>
-          <a:prstGeom prst="rect">
-            <a:avLst/>
-          </a:prstGeom>
-          <a:noFill/>
-        </p:spPr>
-        <p:txBody>
-          <a:bodyPr wrap="square" anchor="t" lIns="0" rIns="0" tIns="0" bIns="0">
-            <a:spAutoFit/>
-          </a:bodyPr>
-          <a:lstStyle/>
-          <a:p>
-            <a:pPr algn="l">
-              <a:lnSpc>
-                <a:spcPct val="115000"/>
-              </a:lnSpc>
-            </a:pPr>
-            <a:r>
-              <a:rPr sz="4000" b="1">
-                <a:solidFill>
-                  <a:srgbClr val="1C2A33"/>
-                </a:solidFill>
-                <a:latin typeface="楷体"/>
-                <a:ea typeface="楷体"/>
-                <a:cs typeface="楷体"/>
-              </a:rPr>
-              <a:t>硫酸</a:t>
-            </a:r>
-          </a:p>
-        </p:txBody>
-      </p:sp>
-      <p:sp>
-        <p:nvSpPr>
-          <p:cNvPr id="6" name="TextBox 5"/>
-          <p:cNvSpPr txBox="1"/>
-          <p:nvPr/>
-        </p:nvSpPr>
-        <p:spPr>
-          <a:xfrm>
-            <a:off x="640080" y="3840480"/>
-            <a:ext cx="10911535" cy="457200"/>
-          </a:xfrm>
-          <a:prstGeom prst="rect">
-            <a:avLst/>
-          </a:prstGeom>
-          <a:noFill/>
-        </p:spPr>
-        <p:txBody>
-          <a:bodyPr wrap="square" anchor="t" lIns="0" rIns="0" tIns="0" bIns="0">
-            <a:spAutoFit/>
-          </a:bodyPr>
-          <a:lstStyle/>
-          <a:p>
-            <a:pPr algn="l"/>
-            <a:r>
-              <a:rPr sz="1700" b="1">
-                <a:solidFill>
-                  <a:srgbClr val="B23A2A"/>
-                </a:solidFill>
-                <a:latin typeface="微软雅黑"/>
-                <a:ea typeface="微软雅黑"/>
-                <a:cs typeface="微软雅黑"/>
-              </a:rPr>
-              <a:t>新课  ·  第2课时  ·  45分钟</a:t>
-            </a:r>
-          </a:p>
-        </p:txBody>
-      </p:sp>
-      <p:sp>
-        <p:nvSpPr>
-          <p:cNvPr id="7" name="Rectangle 6"/>
+          <p:cNvPr id="4" name="Rectangle 3"/>
           <p:cNvSpPr/>
           <p:nvPr/>
         </p:nvSpPr>
         <p:spPr>
           <a:xfrm>
-            <a:off x="640080" y="5394960"/>
-            <a:ext cx="2011680" cy="33020"/>
+            <a:off x="8625535" y="1188720"/>
+            <a:ext cx="822960" cy="38100"/>
           </a:xfrm>
           <a:prstGeom prst="rect">
             <a:avLst/>
@@ -3349,14 +3230,14 @@
       </p:sp>
       <p:sp>
         <p:nvSpPr>
-          <p:cNvPr id="8" name="TextBox 7"/>
+          <p:cNvPr id="5" name="TextBox 4"/>
           <p:cNvSpPr txBox="1"/>
           <p:nvPr/>
         </p:nvSpPr>
         <p:spPr>
           <a:xfrm>
-            <a:off x="640080" y="5623560"/>
-            <a:ext cx="10911535" cy="548640"/>
+            <a:off x="8625535" y="1417320"/>
+            <a:ext cx="3108960" cy="457200"/>
           </a:xfrm>
           <a:prstGeom prst="rect">
             <a:avLst/>
@@ -3371,22 +3252,308 @@
           <a:p>
             <a:pPr algn="l"/>
             <a:r>
-              <a:rPr sz="1400" b="0">
-                <a:solidFill>
-                  <a:srgbClr val="6B6258"/>
+              <a:rPr sz="1600" b="1">
+                <a:solidFill>
+                  <a:srgbClr val="C8A86B"/>
                 </a:solidFill>
                 <a:latin typeface="微软雅黑"/>
                 <a:ea typeface="微软雅黑"/>
                 <a:cs typeface="微软雅黑"/>
               </a:rPr>
-              <a:t>学习任务群：    |    年级：高一</a:t>
-            </a:r>
+              <a:t>化学</a:t>
+            </a:r>
+          </a:p>
+        </p:txBody>
+      </p:sp>
+      <p:sp>
+        <p:nvSpPr>
+          <p:cNvPr id="6" name="TextBox 5"/>
+          <p:cNvSpPr txBox="1"/>
+          <p:nvPr/>
+        </p:nvSpPr>
+        <p:spPr>
+          <a:xfrm>
+            <a:off x="8625535" y="1920240"/>
+            <a:ext cx="3108960" cy="2194560"/>
+          </a:xfrm>
+          <a:prstGeom prst="rect">
+            <a:avLst/>
+          </a:prstGeom>
+          <a:noFill/>
+        </p:spPr>
+        <p:txBody>
+          <a:bodyPr wrap="square" anchor="t" lIns="0" rIns="0" tIns="0" bIns="0">
+            <a:spAutoFit/>
+          </a:bodyPr>
+          <a:lstStyle/>
+          <a:p>
+            <a:pPr algn="l">
+              <a:lnSpc>
+                <a:spcPct val="145000"/>
+              </a:lnSpc>
+            </a:pPr>
+            <a:r>
+              <a:rPr sz="2100" b="1">
+                <a:solidFill>
+                  <a:srgbClr val="FFFFFF"/>
+                </a:solidFill>
+                <a:latin typeface="楷体"/>
+                <a:ea typeface="楷体"/>
+                <a:cs typeface="楷体"/>
+              </a:rPr>
+              <a:t>化工生产中的重要非金属元素</a:t>
+            </a:r>
+          </a:p>
+        </p:txBody>
+      </p:sp>
+      <p:sp>
+        <p:nvSpPr>
+          <p:cNvPr id="7" name="TextBox 6"/>
+          <p:cNvSpPr txBox="1"/>
+          <p:nvPr/>
+        </p:nvSpPr>
+        <p:spPr>
+          <a:xfrm>
+            <a:off x="8625535" y="4937760"/>
+            <a:ext cx="3108960" cy="1097280"/>
+          </a:xfrm>
+          <a:prstGeom prst="rect">
+            <a:avLst/>
+          </a:prstGeom>
+          <a:noFill/>
+        </p:spPr>
+        <p:txBody>
+          <a:bodyPr wrap="square" anchor="t" lIns="0" rIns="0" tIns="0" bIns="0">
+            <a:spAutoFit/>
+          </a:bodyPr>
+          <a:lstStyle/>
+          <a:p>
+            <a:pPr algn="l">
+              <a:lnSpc>
+                <a:spcPct val="140000"/>
+              </a:lnSpc>
+            </a:pPr>
+            <a:r>
+              <a:rPr sz="1300" b="0">
+                <a:solidFill>
+                  <a:srgbClr val="E7DFD2"/>
+                </a:solidFill>
+                <a:latin typeface="微软雅黑"/>
+                <a:ea typeface="微软雅黑"/>
+                <a:cs typeface="微软雅黑"/>
+              </a:rPr>
+              <a:t>高一 · 必修第二册（人教版）</a:t>
+            </a:r>
+          </a:p>
+        </p:txBody>
+      </p:sp>
+      <p:sp>
+        <p:nvSpPr>
+          <p:cNvPr id="8" name="Rectangle 7"/>
+          <p:cNvSpPr/>
+          <p:nvPr/>
+        </p:nvSpPr>
+        <p:spPr>
+          <a:xfrm>
+            <a:off x="640080" y="914400"/>
+            <a:ext cx="822960" cy="38100"/>
+          </a:xfrm>
+          <a:prstGeom prst="rect">
+            <a:avLst/>
+          </a:prstGeom>
+          <a:solidFill>
+            <a:srgbClr val="C8A86B"/>
+          </a:solidFill>
+          <a:ln>
+            <a:noFill/>
+          </a:ln>
+          <a:effectLst/>
+        </p:spPr>
+        <p:style>
+          <a:lnRef idx="1">
+            <a:schemeClr val="accent1"/>
+          </a:lnRef>
+          <a:fillRef idx="3">
+            <a:schemeClr val="accent1"/>
+          </a:fillRef>
+          <a:effectRef idx="2">
+            <a:schemeClr val="accent1"/>
+          </a:effectRef>
+          <a:fontRef idx="minor">
+            <a:schemeClr val="lt1"/>
+          </a:fontRef>
+        </p:style>
+        <p:txBody>
+          <a:bodyPr rtlCol="0" anchor="ctr"/>
+          <a:lstStyle/>
+          <a:p>
+            <a:pPr algn="ctr"/>
           </a:p>
         </p:txBody>
       </p:sp>
       <p:sp>
         <p:nvSpPr>
           <p:cNvPr id="9" name="TextBox 8"/>
+          <p:cNvSpPr txBox="1"/>
+          <p:nvPr/>
+        </p:nvSpPr>
+        <p:spPr>
+          <a:xfrm>
+            <a:off x="640080" y="1143000"/>
+            <a:ext cx="6888175" cy="457200"/>
+          </a:xfrm>
+          <a:prstGeom prst="rect">
+            <a:avLst/>
+          </a:prstGeom>
+          <a:noFill/>
+        </p:spPr>
+        <p:txBody>
+          <a:bodyPr wrap="square" anchor="t" lIns="0" rIns="0" tIns="0" bIns="0">
+            <a:spAutoFit/>
+          </a:bodyPr>
+          <a:lstStyle/>
+          <a:p>
+            <a:pPr algn="l"/>
+            <a:r>
+              <a:rPr sz="1500" b="1">
+                <a:solidFill>
+                  <a:srgbClr val="B23A2A"/>
+                </a:solidFill>
+                <a:latin typeface="微软雅黑"/>
+                <a:ea typeface="微软雅黑"/>
+                <a:cs typeface="微软雅黑"/>
+              </a:rPr>
+              <a:t>高一 · 必修第二册 · 5单元</a:t>
+            </a:r>
+          </a:p>
+        </p:txBody>
+      </p:sp>
+      <p:sp>
+        <p:nvSpPr>
+          <p:cNvPr id="10" name="TextBox 9"/>
+          <p:cNvSpPr txBox="1"/>
+          <p:nvPr/>
+        </p:nvSpPr>
+        <p:spPr>
+          <a:xfrm>
+            <a:off x="640080" y="1737360"/>
+            <a:ext cx="6613855" cy="2011680"/>
+          </a:xfrm>
+          <a:prstGeom prst="rect">
+            <a:avLst/>
+          </a:prstGeom>
+          <a:noFill/>
+        </p:spPr>
+        <p:txBody>
+          <a:bodyPr wrap="square" anchor="t" lIns="0" rIns="0" tIns="0" bIns="0">
+            <a:spAutoFit/>
+          </a:bodyPr>
+          <a:lstStyle/>
+          <a:p>
+            <a:pPr algn="l">
+              <a:lnSpc>
+                <a:spcPct val="115000"/>
+              </a:lnSpc>
+            </a:pPr>
+            <a:r>
+              <a:rPr sz="5000" b="1">
+                <a:solidFill>
+                  <a:srgbClr val="1C2A33"/>
+                </a:solidFill>
+                <a:latin typeface="楷体"/>
+                <a:ea typeface="楷体"/>
+                <a:cs typeface="楷体"/>
+              </a:rPr>
+              <a:t>硫酸</a:t>
+            </a:r>
+          </a:p>
+        </p:txBody>
+      </p:sp>
+      <p:sp>
+        <p:nvSpPr>
+          <p:cNvPr id="11" name="TextBox 10"/>
+          <p:cNvSpPr txBox="1"/>
+          <p:nvPr/>
+        </p:nvSpPr>
+        <p:spPr>
+          <a:xfrm>
+            <a:off x="640080" y="3840480"/>
+            <a:ext cx="6613855" cy="731520"/>
+          </a:xfrm>
+          <a:prstGeom prst="rect">
+            <a:avLst/>
+          </a:prstGeom>
+          <a:noFill/>
+        </p:spPr>
+        <p:txBody>
+          <a:bodyPr wrap="square" anchor="t" lIns="0" rIns="0" tIns="0" bIns="0">
+            <a:spAutoFit/>
+          </a:bodyPr>
+          <a:lstStyle/>
+          <a:p>
+            <a:pPr algn="l">
+              <a:lnSpc>
+                <a:spcPct val="140000"/>
+              </a:lnSpc>
+            </a:pPr>
+            <a:r>
+              <a:rPr sz="1700" b="0">
+                <a:solidFill>
+                  <a:srgbClr val="6B6258"/>
+                </a:solidFill>
+                <a:latin typeface="楷体"/>
+                <a:ea typeface="楷体"/>
+                <a:cs typeface="楷体"/>
+              </a:rPr>
+              <a:t>吸水性 · 脱水性 · 强氧化性</a:t>
+            </a:r>
+          </a:p>
+        </p:txBody>
+      </p:sp>
+      <p:sp>
+        <p:nvSpPr>
+          <p:cNvPr id="12" name="TextBox 11"/>
+          <p:cNvSpPr txBox="1"/>
+          <p:nvPr/>
+        </p:nvSpPr>
+        <p:spPr>
+          <a:xfrm>
+            <a:off x="640080" y="4937760"/>
+            <a:ext cx="6613855" cy="914400"/>
+          </a:xfrm>
+          <a:prstGeom prst="rect">
+            <a:avLst/>
+          </a:prstGeom>
+          <a:noFill/>
+        </p:spPr>
+        <p:txBody>
+          <a:bodyPr wrap="square" anchor="t" lIns="0" rIns="0" tIns="0" bIns="0">
+            <a:spAutoFit/>
+          </a:bodyPr>
+          <a:lstStyle/>
+          <a:p>
+            <a:pPr algn="l">
+              <a:lnSpc>
+                <a:spcPct val="140000"/>
+              </a:lnSpc>
+            </a:pPr>
+            <a:r>
+              <a:rPr sz="1400" b="1">
+                <a:solidFill>
+                  <a:srgbClr val="C8A86B"/>
+                </a:solidFill>
+                <a:latin typeface="微软雅黑"/>
+                <a:ea typeface="微软雅黑"/>
+                <a:cs typeface="微软雅黑"/>
+              </a:rPr>
+              <a:t>硫酸 · 浓硫酸 · 吸水性 · 脱水性 · 强氧化性 · 人教必修二Ch5</a:t>
+            </a:r>
+          </a:p>
+        </p:txBody>
+      </p:sp>
+      <p:sp>
+        <p:nvSpPr>
+          <p:cNvPr id="13" name="TextBox 12"/>
           <p:cNvSpPr txBox="1"/>
           <p:nvPr/>
         </p:nvSpPr>
@@ -3570,14 +3737,51 @@
       </p:sp>
       <p:sp>
         <p:nvSpPr>
-          <p:cNvPr id="5" name="Rounded Rectangle 4"/>
+          <p:cNvPr id="5" name="TextBox 4"/>
+          <p:cNvSpPr txBox="1"/>
+          <p:nvPr/>
+        </p:nvSpPr>
+        <p:spPr>
+          <a:xfrm>
+            <a:off x="640080" y="1325880"/>
+            <a:ext cx="10911535" cy="640080"/>
+          </a:xfrm>
+          <a:prstGeom prst="rect">
+            <a:avLst/>
+          </a:prstGeom>
+          <a:noFill/>
+        </p:spPr>
+        <p:txBody>
+          <a:bodyPr wrap="square" anchor="t" lIns="0" rIns="0" tIns="0" bIns="0">
+            <a:spAutoFit/>
+          </a:bodyPr>
+          <a:lstStyle/>
+          <a:p>
+            <a:pPr algn="l"/>
+            <a:r>
+              <a:rPr sz="3000" b="1">
+                <a:solidFill>
+                  <a:srgbClr val="1C2A33"/>
+                </a:solidFill>
+                <a:latin typeface="楷体"/>
+                <a:ea typeface="楷体"/>
+                <a:cs typeface="楷体"/>
+              </a:rPr>
+              <a:t>四向核心素养目标</a:t>
+            </a:r>
+          </a:p>
+        </p:txBody>
+      </p:sp>
+      <p:sp>
+        <p:nvSpPr>
+          <p:cNvPr id="6" name="Rounded Rectangle 5"/>
           <p:cNvSpPr/>
           <p:nvPr/>
         </p:nvSpPr>
         <p:spPr>
           <a:xfrm>
-            <a:off x="640080" y="1417320"/>
-            <a:ext cx="5349240" cy="2057400"/>
+            <a:off x="640080" y="2377440"/>
+            <a:ext cx="2453563" cy="3931920"/>
           </a:xfrm>
           <a:prstGeom prst="roundRect">
             <a:avLst/>
@@ -3585,7 +3789,7 @@
           <a:solidFill>
             <a:srgbClr val="FFFFFF"/>
           </a:solidFill>
-          <a:ln w="22860">
+          <a:ln w="20320">
             <a:solidFill>
               <a:srgbClr val="B23A2A"/>
             </a:solidFill>
@@ -3616,14 +3820,14 @@
       </p:sp>
       <p:sp>
         <p:nvSpPr>
-          <p:cNvPr id="6" name="Oval 5"/>
+          <p:cNvPr id="7" name="Oval 6"/>
           <p:cNvSpPr/>
           <p:nvPr/>
         </p:nvSpPr>
         <p:spPr>
           <a:xfrm>
-            <a:off x="804672" y="1581912"/>
-            <a:ext cx="457200" cy="457200"/>
+            <a:off x="1455381" y="2697480"/>
+            <a:ext cx="822960" cy="822960"/>
           </a:xfrm>
           <a:prstGeom prst="ellipse">
             <a:avLst/>
@@ -3660,14 +3864,14 @@
       </p:sp>
       <p:sp>
         <p:nvSpPr>
-          <p:cNvPr id="7" name="TextBox 6"/>
+          <p:cNvPr id="8" name="TextBox 7"/>
           <p:cNvSpPr txBox="1"/>
           <p:nvPr/>
         </p:nvSpPr>
         <p:spPr>
           <a:xfrm>
-            <a:off x="804672" y="1636776"/>
-            <a:ext cx="457200" cy="384048"/>
+            <a:off x="1455381" y="2880360"/>
+            <a:ext cx="822960" cy="457200"/>
           </a:xfrm>
           <a:prstGeom prst="rect">
             <a:avLst/>
@@ -3682,29 +3886,66 @@
           <a:p>
             <a:pPr algn="ctr"/>
             <a:r>
+              <a:rPr sz="2400" b="1">
+                <a:solidFill>
+                  <a:srgbClr val="FFFFFF"/>
+                </a:solidFill>
+                <a:latin typeface="楷体"/>
+                <a:ea typeface="楷体"/>
+                <a:cs typeface="楷体"/>
+              </a:rPr>
+              <a:t>1</a:t>
+            </a:r>
+          </a:p>
+        </p:txBody>
+      </p:sp>
+      <p:sp>
+        <p:nvSpPr>
+          <p:cNvPr id="9" name="TextBox 8"/>
+          <p:cNvSpPr txBox="1"/>
+          <p:nvPr/>
+        </p:nvSpPr>
+        <p:spPr>
+          <a:xfrm>
+            <a:off x="822960" y="3749040"/>
+            <a:ext cx="2087803" cy="640080"/>
+          </a:xfrm>
+          <a:prstGeom prst="rect">
+            <a:avLst/>
+          </a:prstGeom>
+          <a:noFill/>
+        </p:spPr>
+        <p:txBody>
+          <a:bodyPr wrap="square" anchor="t" lIns="0" rIns="0" tIns="0" bIns="0">
+            <a:spAutoFit/>
+          </a:bodyPr>
+          <a:lstStyle/>
+          <a:p>
+            <a:pPr algn="ctr"/>
+            <a:r>
               <a:rPr sz="1600" b="1">
                 <a:solidFill>
-                  <a:srgbClr val="FFFFFF"/>
+                  <a:srgbClr val="B23A2A"/>
                 </a:solidFill>
                 <a:latin typeface="微软雅黑"/>
                 <a:ea typeface="微软雅黑"/>
                 <a:cs typeface="微软雅黑"/>
               </a:rPr>
-              <a:t>1</a:t>
-            </a:r>
-          </a:p>
-        </p:txBody>
-      </p:sp>
-      <p:sp>
-        <p:nvSpPr>
-          <p:cNvPr id="8" name="TextBox 7"/>
+              <a:t>宏观辨识与微观探析</a:t>
+            </a:r>
+          </a:p>
+        </p:txBody>
+      </p:sp>
+      <p:sp>
+        <p:nvSpPr>
+          <p:cNvPr id="10" name="TextBox 9"/>
           <p:cNvSpPr txBox="1"/>
           <p:nvPr/>
         </p:nvSpPr>
         <p:spPr>
           <a:xfrm>
-            <a:off x="1371600" y="1527048"/>
-            <a:ext cx="4434840" cy="457200"/>
+            <a:off x="841248" y="4389120"/>
+            <a:ext cx="2051227" cy="1737360"/>
           </a:xfrm>
           <a:prstGeom prst="rect">
             <a:avLst/>
@@ -3717,54 +3958,13 @@
           </a:bodyPr>
           <a:lstStyle/>
           <a:p>
-            <a:pPr algn="l">
+            <a:pPr algn="ctr">
               <a:lnSpc>
-                <a:spcPct val="110000"/>
+                <a:spcPct val="150000"/>
               </a:lnSpc>
             </a:pPr>
             <a:r>
-              <a:rPr sz="1600" b="1">
-                <a:solidFill>
-                  <a:srgbClr val="1C2A33"/>
-                </a:solidFill>
-                <a:latin typeface="微软雅黑"/>
-                <a:ea typeface="微软雅黑"/>
-                <a:cs typeface="微软雅黑"/>
-              </a:rPr>
-              <a:t>目标</a:t>
-            </a:r>
-          </a:p>
-        </p:txBody>
-      </p:sp>
-      <p:sp>
-        <p:nvSpPr>
-          <p:cNvPr id="9" name="TextBox 8"/>
-          <p:cNvSpPr txBox="1"/>
-          <p:nvPr/>
-        </p:nvSpPr>
-        <p:spPr>
-          <a:xfrm>
-            <a:off x="1371600" y="1965960"/>
-            <a:ext cx="4434840" cy="1417320"/>
-          </a:xfrm>
-          <a:prstGeom prst="rect">
-            <a:avLst/>
-          </a:prstGeom>
-          <a:noFill/>
-        </p:spPr>
-        <p:txBody>
-          <a:bodyPr wrap="square" anchor="t" lIns="0" rIns="0" tIns="0" bIns="0">
-            <a:spAutoFit/>
-          </a:bodyPr>
-          <a:lstStyle/>
-          <a:p>
-            <a:pPr algn="l">
-              <a:lnSpc>
-                <a:spcPct val="128000"/>
-              </a:lnSpc>
-            </a:pPr>
-            <a:r>
-              <a:rPr sz="1400" b="0">
+              <a:rPr sz="1300" b="0">
                 <a:solidFill>
                   <a:srgbClr val="1C2A33"/>
                 </a:solidFill>
@@ -3772,21 +3972,21 @@
                 <a:ea typeface="楷体"/>
                 <a:cs typeface="楷体"/>
               </a:rPr>
-              <a:t>宏观辨识与微观探析：描述稀硫酸酸的通性及浓硫酸三大特性。</a:t>
-            </a:r>
-          </a:p>
-        </p:txBody>
-      </p:sp>
-      <p:sp>
-        <p:nvSpPr>
-          <p:cNvPr id="10" name="Rounded Rectangle 9"/>
+              <a:t>描述稀硫酸酸的通性及浓硫酸三大特性。</a:t>
+            </a:r>
+          </a:p>
+        </p:txBody>
+      </p:sp>
+      <p:sp>
+        <p:nvSpPr>
+          <p:cNvPr id="11" name="Rounded Rectangle 10"/>
           <p:cNvSpPr/>
           <p:nvPr/>
         </p:nvSpPr>
         <p:spPr>
           <a:xfrm>
-            <a:off x="6263640" y="1417320"/>
-            <a:ext cx="5349240" cy="2057400"/>
+            <a:off x="3459403" y="2377440"/>
+            <a:ext cx="2453563" cy="3931920"/>
           </a:xfrm>
           <a:prstGeom prst="roundRect">
             <a:avLst/>
@@ -3794,9 +3994,9 @@
           <a:solidFill>
             <a:srgbClr val="FFFFFF"/>
           </a:solidFill>
-          <a:ln w="22860">
+          <a:ln w="20320">
             <a:solidFill>
-              <a:srgbClr val="B23A2A"/>
+              <a:srgbClr val="2E7D6B"/>
             </a:solidFill>
           </a:ln>
           <a:effectLst/>
@@ -3825,20 +4025,20 @@
       </p:sp>
       <p:sp>
         <p:nvSpPr>
-          <p:cNvPr id="11" name="Oval 10"/>
+          <p:cNvPr id="12" name="Oval 11"/>
           <p:cNvSpPr/>
           <p:nvPr/>
         </p:nvSpPr>
         <p:spPr>
           <a:xfrm>
-            <a:off x="6428232" y="1581912"/>
-            <a:ext cx="457200" cy="457200"/>
+            <a:off x="4274705" y="2697480"/>
+            <a:ext cx="822960" cy="822960"/>
           </a:xfrm>
           <a:prstGeom prst="ellipse">
             <a:avLst/>
           </a:prstGeom>
           <a:solidFill>
-            <a:srgbClr val="B23A2A"/>
+            <a:srgbClr val="2E7D6B"/>
           </a:solidFill>
           <a:ln>
             <a:noFill/>
@@ -3869,14 +4069,14 @@
       </p:sp>
       <p:sp>
         <p:nvSpPr>
-          <p:cNvPr id="12" name="TextBox 11"/>
+          <p:cNvPr id="13" name="TextBox 12"/>
           <p:cNvSpPr txBox="1"/>
           <p:nvPr/>
         </p:nvSpPr>
         <p:spPr>
           <a:xfrm>
-            <a:off x="6428232" y="1636776"/>
-            <a:ext cx="457200" cy="384048"/>
+            <a:off x="4274705" y="2880360"/>
+            <a:ext cx="822960" cy="457200"/>
           </a:xfrm>
           <a:prstGeom prst="rect">
             <a:avLst/>
@@ -3891,29 +4091,66 @@
           <a:p>
             <a:pPr algn="ctr"/>
             <a:r>
+              <a:rPr sz="2400" b="1">
+                <a:solidFill>
+                  <a:srgbClr val="FFFFFF"/>
+                </a:solidFill>
+                <a:latin typeface="楷体"/>
+                <a:ea typeface="楷体"/>
+                <a:cs typeface="楷体"/>
+              </a:rPr>
+              <a:t>2</a:t>
+            </a:r>
+          </a:p>
+        </p:txBody>
+      </p:sp>
+      <p:sp>
+        <p:nvSpPr>
+          <p:cNvPr id="14" name="TextBox 13"/>
+          <p:cNvSpPr txBox="1"/>
+          <p:nvPr/>
+        </p:nvSpPr>
+        <p:spPr>
+          <a:xfrm>
+            <a:off x="3642283" y="3749040"/>
+            <a:ext cx="2087803" cy="640080"/>
+          </a:xfrm>
+          <a:prstGeom prst="rect">
+            <a:avLst/>
+          </a:prstGeom>
+          <a:noFill/>
+        </p:spPr>
+        <p:txBody>
+          <a:bodyPr wrap="square" anchor="t" lIns="0" rIns="0" tIns="0" bIns="0">
+            <a:spAutoFit/>
+          </a:bodyPr>
+          <a:lstStyle/>
+          <a:p>
+            <a:pPr algn="ctr"/>
+            <a:r>
               <a:rPr sz="1600" b="1">
                 <a:solidFill>
-                  <a:srgbClr val="FFFFFF"/>
+                  <a:srgbClr val="2E7D6B"/>
                 </a:solidFill>
                 <a:latin typeface="微软雅黑"/>
                 <a:ea typeface="微软雅黑"/>
                 <a:cs typeface="微软雅黑"/>
               </a:rPr>
-              <a:t>2</a:t>
-            </a:r>
-          </a:p>
-        </p:txBody>
-      </p:sp>
-      <p:sp>
-        <p:nvSpPr>
-          <p:cNvPr id="13" name="TextBox 12"/>
+              <a:t>变化观念与平衡思想</a:t>
+            </a:r>
+          </a:p>
+        </p:txBody>
+      </p:sp>
+      <p:sp>
+        <p:nvSpPr>
+          <p:cNvPr id="15" name="TextBox 14"/>
           <p:cNvSpPr txBox="1"/>
           <p:nvPr/>
         </p:nvSpPr>
         <p:spPr>
           <a:xfrm>
-            <a:off x="6995160" y="1527048"/>
-            <a:ext cx="4434840" cy="457200"/>
+            <a:off x="3660571" y="4389120"/>
+            <a:ext cx="2051227" cy="1737360"/>
           </a:xfrm>
           <a:prstGeom prst="rect">
             <a:avLst/>
@@ -3926,54 +4163,13 @@
           </a:bodyPr>
           <a:lstStyle/>
           <a:p>
-            <a:pPr algn="l">
+            <a:pPr algn="ctr">
               <a:lnSpc>
-                <a:spcPct val="110000"/>
+                <a:spcPct val="150000"/>
               </a:lnSpc>
             </a:pPr>
             <a:r>
-              <a:rPr sz="1600" b="1">
-                <a:solidFill>
-                  <a:srgbClr val="1C2A33"/>
-                </a:solidFill>
-                <a:latin typeface="微软雅黑"/>
-                <a:ea typeface="微软雅黑"/>
-                <a:cs typeface="微软雅黑"/>
-              </a:rPr>
-              <a:t>目标</a:t>
-            </a:r>
-          </a:p>
-        </p:txBody>
-      </p:sp>
-      <p:sp>
-        <p:nvSpPr>
-          <p:cNvPr id="14" name="TextBox 13"/>
-          <p:cNvSpPr txBox="1"/>
-          <p:nvPr/>
-        </p:nvSpPr>
-        <p:spPr>
-          <a:xfrm>
-            <a:off x="6995160" y="1965960"/>
-            <a:ext cx="4434840" cy="1417320"/>
-          </a:xfrm>
-          <a:prstGeom prst="rect">
-            <a:avLst/>
-          </a:prstGeom>
-          <a:noFill/>
-        </p:spPr>
-        <p:txBody>
-          <a:bodyPr wrap="square" anchor="t" lIns="0" rIns="0" tIns="0" bIns="0">
-            <a:spAutoFit/>
-          </a:bodyPr>
-          <a:lstStyle/>
-          <a:p>
-            <a:pPr algn="l">
-              <a:lnSpc>
-                <a:spcPct val="128000"/>
-              </a:lnSpc>
-            </a:pPr>
-            <a:r>
-              <a:rPr sz="1400" b="0">
+              <a:rPr sz="1300" b="0">
                 <a:solidFill>
                   <a:srgbClr val="1C2A33"/>
                 </a:solidFill>
@@ -3981,21 +4177,21 @@
                 <a:ea typeface="楷体"/>
                 <a:cs typeface="楷体"/>
               </a:rPr>
-              <a:t>变化观念与平衡思想：认识浓硫酸强氧化性中S+6被还原为SO2。</a:t>
-            </a:r>
-          </a:p>
-        </p:txBody>
-      </p:sp>
-      <p:sp>
-        <p:nvSpPr>
-          <p:cNvPr id="15" name="Rounded Rectangle 14"/>
+              <a:t>认识浓硫酸强氧化性中S+6被还原为SO2。</a:t>
+            </a:r>
+          </a:p>
+        </p:txBody>
+      </p:sp>
+      <p:sp>
+        <p:nvSpPr>
+          <p:cNvPr id="16" name="Rounded Rectangle 15"/>
           <p:cNvSpPr/>
           <p:nvPr/>
         </p:nvSpPr>
         <p:spPr>
           <a:xfrm>
-            <a:off x="640080" y="3703320"/>
-            <a:ext cx="5349240" cy="2057400"/>
+            <a:off x="6278727" y="2377440"/>
+            <a:ext cx="2453563" cy="3931920"/>
           </a:xfrm>
           <a:prstGeom prst="roundRect">
             <a:avLst/>
@@ -4003,9 +4199,9 @@
           <a:solidFill>
             <a:srgbClr val="FFFFFF"/>
           </a:solidFill>
-          <a:ln w="22860">
+          <a:ln w="20320">
             <a:solidFill>
-              <a:srgbClr val="B23A2A"/>
+              <a:srgbClr val="C8A86B"/>
             </a:solidFill>
           </a:ln>
           <a:effectLst/>
@@ -4034,20 +4230,20 @@
       </p:sp>
       <p:sp>
         <p:nvSpPr>
-          <p:cNvPr id="16" name="Oval 15"/>
+          <p:cNvPr id="17" name="Oval 16"/>
           <p:cNvSpPr/>
           <p:nvPr/>
         </p:nvSpPr>
         <p:spPr>
           <a:xfrm>
-            <a:off x="804672" y="3867912"/>
-            <a:ext cx="457200" cy="457200"/>
+            <a:off x="7094029" y="2697480"/>
+            <a:ext cx="822960" cy="822960"/>
           </a:xfrm>
           <a:prstGeom prst="ellipse">
             <a:avLst/>
           </a:prstGeom>
           <a:solidFill>
-            <a:srgbClr val="B23A2A"/>
+            <a:srgbClr val="C8A86B"/>
           </a:solidFill>
           <a:ln>
             <a:noFill/>
@@ -4078,14 +4274,14 @@
       </p:sp>
       <p:sp>
         <p:nvSpPr>
-          <p:cNvPr id="17" name="TextBox 16"/>
+          <p:cNvPr id="18" name="TextBox 17"/>
           <p:cNvSpPr txBox="1"/>
           <p:nvPr/>
         </p:nvSpPr>
         <p:spPr>
           <a:xfrm>
-            <a:off x="804672" y="3922776"/>
-            <a:ext cx="457200" cy="384048"/>
+            <a:off x="7094029" y="2880360"/>
+            <a:ext cx="822960" cy="457200"/>
           </a:xfrm>
           <a:prstGeom prst="rect">
             <a:avLst/>
@@ -4100,29 +4296,66 @@
           <a:p>
             <a:pPr algn="ctr"/>
             <a:r>
+              <a:rPr sz="2400" b="1">
+                <a:solidFill>
+                  <a:srgbClr val="FFFFFF"/>
+                </a:solidFill>
+                <a:latin typeface="楷体"/>
+                <a:ea typeface="楷体"/>
+                <a:cs typeface="楷体"/>
+              </a:rPr>
+              <a:t>3</a:t>
+            </a:r>
+          </a:p>
+        </p:txBody>
+      </p:sp>
+      <p:sp>
+        <p:nvSpPr>
+          <p:cNvPr id="19" name="TextBox 18"/>
+          <p:cNvSpPr txBox="1"/>
+          <p:nvPr/>
+        </p:nvSpPr>
+        <p:spPr>
+          <a:xfrm>
+            <a:off x="6461607" y="3749040"/>
+            <a:ext cx="2087803" cy="640080"/>
+          </a:xfrm>
+          <a:prstGeom prst="rect">
+            <a:avLst/>
+          </a:prstGeom>
+          <a:noFill/>
+        </p:spPr>
+        <p:txBody>
+          <a:bodyPr wrap="square" anchor="t" lIns="0" rIns="0" tIns="0" bIns="0">
+            <a:spAutoFit/>
+          </a:bodyPr>
+          <a:lstStyle/>
+          <a:p>
+            <a:pPr algn="ctr"/>
+            <a:r>
               <a:rPr sz="1600" b="1">
                 <a:solidFill>
-                  <a:srgbClr val="FFFFFF"/>
+                  <a:srgbClr val="C8A86B"/>
                 </a:solidFill>
                 <a:latin typeface="微软雅黑"/>
                 <a:ea typeface="微软雅黑"/>
                 <a:cs typeface="微软雅黑"/>
               </a:rPr>
-              <a:t>3</a:t>
-            </a:r>
-          </a:p>
-        </p:txBody>
-      </p:sp>
-      <p:sp>
-        <p:nvSpPr>
-          <p:cNvPr id="18" name="TextBox 17"/>
+              <a:t>证据推理与模型认知</a:t>
+            </a:r>
+          </a:p>
+        </p:txBody>
+      </p:sp>
+      <p:sp>
+        <p:nvSpPr>
+          <p:cNvPr id="20" name="TextBox 19"/>
           <p:cNvSpPr txBox="1"/>
           <p:nvPr/>
         </p:nvSpPr>
         <p:spPr>
           <a:xfrm>
-            <a:off x="1371600" y="3813048"/>
-            <a:ext cx="4434840" cy="457200"/>
+            <a:off x="6479895" y="4389120"/>
+            <a:ext cx="2051227" cy="1737360"/>
           </a:xfrm>
           <a:prstGeom prst="rect">
             <a:avLst/>
@@ -4135,54 +4368,13 @@
           </a:bodyPr>
           <a:lstStyle/>
           <a:p>
-            <a:pPr algn="l">
+            <a:pPr algn="ctr">
               <a:lnSpc>
-                <a:spcPct val="110000"/>
+                <a:spcPct val="150000"/>
               </a:lnSpc>
             </a:pPr>
             <a:r>
-              <a:rPr sz="1600" b="1">
-                <a:solidFill>
-                  <a:srgbClr val="1C2A33"/>
-                </a:solidFill>
-                <a:latin typeface="微软雅黑"/>
-                <a:ea typeface="微软雅黑"/>
-                <a:cs typeface="微软雅黑"/>
-              </a:rPr>
-              <a:t>目标</a:t>
-            </a:r>
-          </a:p>
-        </p:txBody>
-      </p:sp>
-      <p:sp>
-        <p:nvSpPr>
-          <p:cNvPr id="19" name="TextBox 18"/>
-          <p:cNvSpPr txBox="1"/>
-          <p:nvPr/>
-        </p:nvSpPr>
-        <p:spPr>
-          <a:xfrm>
-            <a:off x="1371600" y="4251960"/>
-            <a:ext cx="4434840" cy="1417320"/>
-          </a:xfrm>
-          <a:prstGeom prst="rect">
-            <a:avLst/>
-          </a:prstGeom>
-          <a:noFill/>
-        </p:spPr>
-        <p:txBody>
-          <a:bodyPr wrap="square" anchor="t" lIns="0" rIns="0" tIns="0" bIns="0">
-            <a:spAutoFit/>
-          </a:bodyPr>
-          <a:lstStyle/>
-          <a:p>
-            <a:pPr algn="l">
-              <a:lnSpc>
-                <a:spcPct val="128000"/>
-              </a:lnSpc>
-            </a:pPr>
-            <a:r>
-              <a:rPr sz="1400" b="0">
+              <a:rPr sz="1300" b="0">
                 <a:solidFill>
                   <a:srgbClr val="1C2A33"/>
                 </a:solidFill>
@@ -4190,21 +4382,21 @@
                 <a:ea typeface="楷体"/>
                 <a:cs typeface="楷体"/>
               </a:rPr>
-              <a:t>证据推理与模型认知：用实验证据解释吸水性与脱水性的差异。</a:t>
-            </a:r>
-          </a:p>
-        </p:txBody>
-      </p:sp>
-      <p:sp>
-        <p:nvSpPr>
-          <p:cNvPr id="20" name="Rounded Rectangle 19"/>
+              <a:t>用实验证据解释吸水性与脱水性的差异。</a:t>
+            </a:r>
+          </a:p>
+        </p:txBody>
+      </p:sp>
+      <p:sp>
+        <p:nvSpPr>
+          <p:cNvPr id="21" name="Rounded Rectangle 20"/>
           <p:cNvSpPr/>
           <p:nvPr/>
         </p:nvSpPr>
         <p:spPr>
           <a:xfrm>
-            <a:off x="6263640" y="3703320"/>
-            <a:ext cx="5349240" cy="2057400"/>
+            <a:off x="9098051" y="2377440"/>
+            <a:ext cx="2453563" cy="3931920"/>
           </a:xfrm>
           <a:prstGeom prst="roundRect">
             <a:avLst/>
@@ -4212,9 +4404,9 @@
           <a:solidFill>
             <a:srgbClr val="FFFFFF"/>
           </a:solidFill>
-          <a:ln w="22860">
+          <a:ln w="20320">
             <a:solidFill>
-              <a:srgbClr val="B23A2A"/>
+              <a:srgbClr val="6B6258"/>
             </a:solidFill>
           </a:ln>
           <a:effectLst/>
@@ -4243,20 +4435,20 @@
       </p:sp>
       <p:sp>
         <p:nvSpPr>
-          <p:cNvPr id="21" name="Oval 20"/>
+          <p:cNvPr id="22" name="Oval 21"/>
           <p:cNvSpPr/>
           <p:nvPr/>
         </p:nvSpPr>
         <p:spPr>
           <a:xfrm>
-            <a:off x="6428232" y="3867912"/>
-            <a:ext cx="457200" cy="457200"/>
+            <a:off x="9913353" y="2697480"/>
+            <a:ext cx="822960" cy="822960"/>
           </a:xfrm>
           <a:prstGeom prst="ellipse">
             <a:avLst/>
           </a:prstGeom>
           <a:solidFill>
-            <a:srgbClr val="B23A2A"/>
+            <a:srgbClr val="6B6258"/>
           </a:solidFill>
           <a:ln>
             <a:noFill/>
@@ -4287,14 +4479,14 @@
       </p:sp>
       <p:sp>
         <p:nvSpPr>
-          <p:cNvPr id="22" name="TextBox 21"/>
+          <p:cNvPr id="23" name="TextBox 22"/>
           <p:cNvSpPr txBox="1"/>
           <p:nvPr/>
         </p:nvSpPr>
         <p:spPr>
           <a:xfrm>
-            <a:off x="6428232" y="3922776"/>
-            <a:ext cx="457200" cy="384048"/>
+            <a:off x="9913353" y="2880360"/>
+            <a:ext cx="822960" cy="457200"/>
           </a:xfrm>
           <a:prstGeom prst="rect">
             <a:avLst/>
@@ -4309,29 +4501,66 @@
           <a:p>
             <a:pPr algn="ctr"/>
             <a:r>
+              <a:rPr sz="2400" b="1">
+                <a:solidFill>
+                  <a:srgbClr val="FFFFFF"/>
+                </a:solidFill>
+                <a:latin typeface="楷体"/>
+                <a:ea typeface="楷体"/>
+                <a:cs typeface="楷体"/>
+              </a:rPr>
+              <a:t>4</a:t>
+            </a:r>
+          </a:p>
+        </p:txBody>
+      </p:sp>
+      <p:sp>
+        <p:nvSpPr>
+          <p:cNvPr id="24" name="TextBox 23"/>
+          <p:cNvSpPr txBox="1"/>
+          <p:nvPr/>
+        </p:nvSpPr>
+        <p:spPr>
+          <a:xfrm>
+            <a:off x="9280931" y="3749040"/>
+            <a:ext cx="2087803" cy="640080"/>
+          </a:xfrm>
+          <a:prstGeom prst="rect">
+            <a:avLst/>
+          </a:prstGeom>
+          <a:noFill/>
+        </p:spPr>
+        <p:txBody>
+          <a:bodyPr wrap="square" anchor="t" lIns="0" rIns="0" tIns="0" bIns="0">
+            <a:spAutoFit/>
+          </a:bodyPr>
+          <a:lstStyle/>
+          <a:p>
+            <a:pPr algn="ctr"/>
+            <a:r>
               <a:rPr sz="1600" b="1">
                 <a:solidFill>
-                  <a:srgbClr val="FFFFFF"/>
+                  <a:srgbClr val="6B6258"/>
                 </a:solidFill>
                 <a:latin typeface="微软雅黑"/>
                 <a:ea typeface="微软雅黑"/>
                 <a:cs typeface="微软雅黑"/>
               </a:rPr>
-              <a:t>4</a:t>
-            </a:r>
-          </a:p>
-        </p:txBody>
-      </p:sp>
-      <p:sp>
-        <p:nvSpPr>
-          <p:cNvPr id="23" name="TextBox 22"/>
+              <a:t>科学探究与创新意识</a:t>
+            </a:r>
+          </a:p>
+        </p:txBody>
+      </p:sp>
+      <p:sp>
+        <p:nvSpPr>
+          <p:cNvPr id="25" name="TextBox 24"/>
           <p:cNvSpPr txBox="1"/>
           <p:nvPr/>
         </p:nvSpPr>
         <p:spPr>
           <a:xfrm>
-            <a:off x="6995160" y="3813048"/>
-            <a:ext cx="4434840" cy="457200"/>
+            <a:off x="9299219" y="4389120"/>
+            <a:ext cx="2051227" cy="1737360"/>
           </a:xfrm>
           <a:prstGeom prst="rect">
             <a:avLst/>
@@ -4344,54 +4573,13 @@
           </a:bodyPr>
           <a:lstStyle/>
           <a:p>
-            <a:pPr algn="l">
+            <a:pPr algn="ctr">
               <a:lnSpc>
-                <a:spcPct val="110000"/>
+                <a:spcPct val="150000"/>
               </a:lnSpc>
             </a:pPr>
             <a:r>
-              <a:rPr sz="1600" b="1">
-                <a:solidFill>
-                  <a:srgbClr val="1C2A33"/>
-                </a:solidFill>
-                <a:latin typeface="微软雅黑"/>
-                <a:ea typeface="微软雅黑"/>
-                <a:cs typeface="微软雅黑"/>
-              </a:rPr>
-              <a:t>目标</a:t>
-            </a:r>
-          </a:p>
-        </p:txBody>
-      </p:sp>
-      <p:sp>
-        <p:nvSpPr>
-          <p:cNvPr id="24" name="TextBox 23"/>
-          <p:cNvSpPr txBox="1"/>
-          <p:nvPr/>
-        </p:nvSpPr>
-        <p:spPr>
-          <a:xfrm>
-            <a:off x="6995160" y="4251960"/>
-            <a:ext cx="4434840" cy="1417320"/>
-          </a:xfrm>
-          <a:prstGeom prst="rect">
-            <a:avLst/>
-          </a:prstGeom>
-          <a:noFill/>
-        </p:spPr>
-        <p:txBody>
-          <a:bodyPr wrap="square" anchor="t" lIns="0" rIns="0" tIns="0" bIns="0">
-            <a:spAutoFit/>
-          </a:bodyPr>
-          <a:lstStyle/>
-          <a:p>
-            <a:pPr algn="l">
-              <a:lnSpc>
-                <a:spcPct val="128000"/>
-              </a:lnSpc>
-            </a:pPr>
-            <a:r>
-              <a:rPr sz="1400" b="0">
+              <a:rPr sz="1300" b="0">
                 <a:solidFill>
                   <a:srgbClr val="1C2A33"/>
                 </a:solidFill>
@@ -4399,14 +4587,14 @@
                 <a:ea typeface="楷体"/>
                 <a:cs typeface="楷体"/>
               </a:rPr>
-              <a:t>科学探究与创新意识：通过Cu与浓H2SO4实验探究强氧化性，规范稀释操作。</a:t>
-            </a:r>
-          </a:p>
-        </p:txBody>
-      </p:sp>
-      <p:sp>
-        <p:nvSpPr>
-          <p:cNvPr id="25" name="TextBox 24"/>
+              <a:t>通过Cu与浓H2SO4实验探究强氧化性，规范稀释操作。</a:t>
+            </a:r>
+          </a:p>
+        </p:txBody>
+      </p:sp>
+      <p:sp>
+        <p:nvSpPr>
+          <p:cNvPr id="26" name="TextBox 25"/>
           <p:cNvSpPr txBox="1"/>
           <p:nvPr/>
         </p:nvSpPr>
@@ -4533,13 +4721,13 @@
             <a:r>
               <a:rPr sz="1300" b="1">
                 <a:solidFill>
-                  <a:srgbClr val="2E7D6B"/>
+                  <a:srgbClr val="B23A2A"/>
                 </a:solidFill>
                 <a:latin typeface="微软雅黑"/>
                 <a:ea typeface="微软雅黑"/>
                 <a:cs typeface="微软雅黑"/>
               </a:rPr>
-              <a:t>课文背景</a:t>
+              <a:t>背景与权威调研</a:t>
             </a:r>
           </a:p>
         </p:txBody>
@@ -4559,7 +4747,7 @@
             <a:avLst/>
           </a:prstGeom>
           <a:solidFill>
-            <a:srgbClr val="2E7D6B"/>
+            <a:srgbClr val="B23A2A"/>
           </a:solidFill>
           <a:ln>
             <a:noFill/>
@@ -4596,8 +4784,8 @@
         </p:nvSpPr>
         <p:spPr>
           <a:xfrm>
-            <a:off x="640080" y="1508760"/>
-            <a:ext cx="6766560" cy="4572000"/>
+            <a:off x="640080" y="1325880"/>
+            <a:ext cx="10911535" cy="640080"/>
           </a:xfrm>
           <a:prstGeom prst="rect">
             <a:avLst/>
@@ -4610,16 +4798,53 @@
           </a:bodyPr>
           <a:lstStyle/>
           <a:p>
+            <a:pPr algn="l"/>
+            <a:r>
+              <a:rPr sz="3000" b="1">
+                <a:solidFill>
+                  <a:srgbClr val="1C2A33"/>
+                </a:solidFill>
+                <a:latin typeface="楷体"/>
+                <a:ea typeface="楷体"/>
+                <a:cs typeface="楷体"/>
+              </a:rPr>
+              <a:t>为什么学这一课</a:t>
+            </a:r>
+          </a:p>
+        </p:txBody>
+      </p:sp>
+      <p:sp>
+        <p:nvSpPr>
+          <p:cNvPr id="6" name="TextBox 5"/>
+          <p:cNvSpPr txBox="1"/>
+          <p:nvPr/>
+        </p:nvSpPr>
+        <p:spPr>
+          <a:xfrm>
+            <a:off x="640080" y="2103120"/>
+            <a:ext cx="5227167" cy="4206240"/>
+          </a:xfrm>
+          <a:prstGeom prst="rect">
+            <a:avLst/>
+          </a:prstGeom>
+          <a:noFill/>
+        </p:spPr>
+        <p:txBody>
+          <a:bodyPr wrap="square" anchor="t" lIns="0" rIns="0" tIns="0" bIns="0">
+            <a:spAutoFit/>
+          </a:bodyPr>
+          <a:lstStyle/>
+          <a:p>
             <a:pPr algn="l">
               <a:lnSpc>
-                <a:spcPct val="150000"/>
+                <a:spcPct val="155000"/>
               </a:lnSpc>
               <a:spcAft>
-                <a:spcPts val="600"/>
+                <a:spcPts val="900"/>
               </a:spcAft>
             </a:pPr>
             <a:r>
-              <a:rPr sz="1600" b="0">
+              <a:rPr sz="1450" b="0">
                 <a:solidFill>
                   <a:srgbClr val="1C2A33"/>
                 </a:solidFill>
@@ -4632,41 +4857,57 @@
           </a:p>
         </p:txBody>
       </p:sp>
-      <p:pic>
-        <p:nvPicPr>
-          <p:cNvPr id="6" name="Picture 5" descr="craft.jpg"/>
-          <p:cNvPicPr>
-            <a:picLocks noChangeAspect="1"/>
-          </p:cNvPicPr>
-          <p:nvPr/>
-        </p:nvPicPr>
-        <p:blipFill>
-          <a:blip r:embed="rId2"/>
-          <a:srcRect l="368" r="368"/>
-          <a:stretch>
-            <a:fillRect/>
-          </a:stretch>
-        </p:blipFill>
-        <p:spPr>
-          <a:xfrm>
-            <a:off x="8046720" y="1508760"/>
-            <a:ext cx="4114800" cy="3108960"/>
-          </a:xfrm>
-          <a:prstGeom prst="rect">
-            <a:avLst/>
-          </a:prstGeom>
-        </p:spPr>
-      </p:pic>
-      <p:sp>
-        <p:nvSpPr>
-          <p:cNvPr id="7" name="TextBox 6"/>
+      <p:sp>
+        <p:nvSpPr>
+          <p:cNvPr id="7" name="Rounded Rectangle 6"/>
+          <p:cNvSpPr/>
+          <p:nvPr/>
+        </p:nvSpPr>
+        <p:spPr>
+          <a:xfrm>
+            <a:off x="6324447" y="2103120"/>
+            <a:ext cx="5227167" cy="3657600"/>
+          </a:xfrm>
+          <a:prstGeom prst="roundRect">
+            <a:avLst/>
+          </a:prstGeom>
+          <a:solidFill>
+            <a:srgbClr val="1C2A33"/>
+          </a:solidFill>
+          <a:effectLst/>
+        </p:spPr>
+        <p:style>
+          <a:lnRef idx="1">
+            <a:schemeClr val="accent1"/>
+          </a:lnRef>
+          <a:fillRef idx="3">
+            <a:schemeClr val="accent1"/>
+          </a:fillRef>
+          <a:effectRef idx="2">
+            <a:schemeClr val="accent1"/>
+          </a:effectRef>
+          <a:fontRef idx="minor">
+            <a:schemeClr val="lt1"/>
+          </a:fontRef>
+        </p:style>
+        <p:txBody>
+          <a:bodyPr rtlCol="0" anchor="ctr"/>
+          <a:lstStyle/>
+          <a:p>
+            <a:pPr algn="ctr"/>
+          </a:p>
+        </p:txBody>
+      </p:sp>
+      <p:sp>
+        <p:nvSpPr>
+          <p:cNvPr id="8" name="TextBox 7"/>
           <p:cNvSpPr txBox="1"/>
           <p:nvPr/>
         </p:nvSpPr>
         <p:spPr>
           <a:xfrm>
-            <a:off x="8046720" y="4663440"/>
-            <a:ext cx="4114800" cy="365760"/>
+            <a:off x="6598767" y="2240280"/>
+            <a:ext cx="4678527" cy="457200"/>
           </a:xfrm>
           <a:prstGeom prst="rect">
             <a:avLst/>
@@ -4679,24 +4920,126 @@
           </a:bodyPr>
           <a:lstStyle/>
           <a:p>
-            <a:pPr algn="ctr"/>
-            <a:r>
-              <a:rPr sz="1100" b="0">
-                <a:solidFill>
-                  <a:srgbClr val="6B6258"/>
+            <a:pPr algn="l"/>
+            <a:r>
+              <a:rPr sz="1700" b="1">
+                <a:solidFill>
+                  <a:srgbClr val="C8A86B"/>
+                </a:solidFill>
+                <a:latin typeface="楷体"/>
+                <a:ea typeface="楷体"/>
+                <a:cs typeface="楷体"/>
+              </a:rPr>
+              <a:t>权威调研来源</a:t>
+            </a:r>
+          </a:p>
+        </p:txBody>
+      </p:sp>
+      <p:sp>
+        <p:nvSpPr>
+          <p:cNvPr id="9" name="TextBox 8"/>
+          <p:cNvSpPr txBox="1"/>
+          <p:nvPr/>
+        </p:nvSpPr>
+        <p:spPr>
+          <a:xfrm>
+            <a:off x="6598767" y="2788920"/>
+            <a:ext cx="4678527" cy="2834640"/>
+          </a:xfrm>
+          <a:prstGeom prst="rect">
+            <a:avLst/>
+          </a:prstGeom>
+          <a:noFill/>
+        </p:spPr>
+        <p:txBody>
+          <a:bodyPr wrap="square" anchor="t" lIns="0" rIns="0" tIns="0" bIns="0">
+            <a:spAutoFit/>
+          </a:bodyPr>
+          <a:lstStyle/>
+          <a:p>
+            <a:pPr algn="l">
+              <a:lnSpc>
+                <a:spcPct val="145000"/>
+              </a:lnSpc>
+              <a:spcAft>
+                <a:spcPts val="700"/>
+              </a:spcAft>
+            </a:pPr>
+            <a:r>
+              <a:rPr sz="1250" b="0">
+                <a:solidFill>
+                  <a:srgbClr val="FFFFFF"/>
                 </a:solidFill>
                 <a:latin typeface="微软雅黑"/>
                 <a:ea typeface="微软雅黑"/>
                 <a:cs typeface="微软雅黑"/>
               </a:rPr>
-              <a:t>资料图（自由授权，复用 craft.jpg）</a:t>
-            </a:r>
-          </a:p>
-        </p:txBody>
-      </p:sp>
-      <p:sp>
-        <p:nvSpPr>
-          <p:cNvPr id="8" name="TextBox 7"/>
+              <a:t>1. 科普/教材：浓硫酸具吸水性、脱水性、强氧化性</a:t>
+            </a:r>
+          </a:p>
+          <a:p>
+            <a:pPr algn="l">
+              <a:lnSpc>
+                <a:spcPct val="145000"/>
+              </a:lnSpc>
+              <a:spcAft>
+                <a:spcPts val="700"/>
+              </a:spcAft>
+            </a:pPr>
+            <a:r>
+              <a:rPr sz="1250" b="0">
+                <a:solidFill>
+                  <a:srgbClr val="FFFFFF"/>
+                </a:solidFill>
+                <a:latin typeface="微软雅黑"/>
+                <a:ea typeface="微软雅黑"/>
+                <a:cs typeface="微软雅黑"/>
+              </a:rPr>
+              <a:t>2. Cu+2H₂SO₄(浓)→CuSO₄+SO₂↑+2H₂O（加热，见 arjunschool 等权威整理）</a:t>
+            </a:r>
+          </a:p>
+        </p:txBody>
+      </p:sp>
+      <p:sp>
+        <p:nvSpPr>
+          <p:cNvPr id="10" name="TextBox 9"/>
+          <p:cNvSpPr txBox="1"/>
+          <p:nvPr/>
+        </p:nvSpPr>
+        <p:spPr>
+          <a:xfrm>
+            <a:off x="640080" y="6400800"/>
+            <a:ext cx="10911535" cy="365760"/>
+          </a:xfrm>
+          <a:prstGeom prst="rect">
+            <a:avLst/>
+          </a:prstGeom>
+          <a:noFill/>
+        </p:spPr>
+        <p:txBody>
+          <a:bodyPr wrap="square" anchor="t" lIns="0" rIns="0" tIns="0" bIns="0">
+            <a:spAutoFit/>
+          </a:bodyPr>
+          <a:lstStyle/>
+          <a:p>
+            <a:pPr algn="ctr"/>
+            <a:r>
+              <a:rPr sz="1100" b="0">
+                <a:solidFill>
+                  <a:srgbClr val="6B6258"/>
+                </a:solidFill>
+                <a:latin typeface="微软雅黑"/>
+                <a:ea typeface="微软雅黑"/>
+                <a:cs typeface="微软雅黑"/>
+              </a:rPr>
+              <a:t>本课件未使用无关配图（学科色块兜底，规范 §2.3）</a:t>
+            </a:r>
+          </a:p>
+        </p:txBody>
+      </p:sp>
+      <p:sp>
+        <p:nvSpPr>
+          <p:cNvPr id="11" name="TextBox 10"/>
           <p:cNvSpPr txBox="1"/>
           <p:nvPr/>
         </p:nvSpPr>
@@ -4829,7 +5172,7 @@
                 <a:ea typeface="微软雅黑"/>
                 <a:cs typeface="微软雅黑"/>
               </a:rPr>
-              <a:t>学习重点</a:t>
+              <a:t>重点</a:t>
             </a:r>
           </a:p>
         </p:txBody>
@@ -4880,14 +5223,51 @@
       </p:sp>
       <p:sp>
         <p:nvSpPr>
-          <p:cNvPr id="5" name="Rounded Rectangle 4"/>
+          <p:cNvPr id="5" name="TextBox 4"/>
+          <p:cNvSpPr txBox="1"/>
+          <p:nvPr/>
+        </p:nvSpPr>
+        <p:spPr>
+          <a:xfrm>
+            <a:off x="640080" y="1325880"/>
+            <a:ext cx="10911535" cy="640080"/>
+          </a:xfrm>
+          <a:prstGeom prst="rect">
+            <a:avLst/>
+          </a:prstGeom>
+          <a:noFill/>
+        </p:spPr>
+        <p:txBody>
+          <a:bodyPr wrap="square" anchor="t" lIns="0" rIns="0" tIns="0" bIns="0">
+            <a:spAutoFit/>
+          </a:bodyPr>
+          <a:lstStyle/>
+          <a:p>
+            <a:pPr algn="l"/>
+            <a:r>
+              <a:rPr sz="3000" b="1">
+                <a:solidFill>
+                  <a:srgbClr val="1C2A33"/>
+                </a:solidFill>
+                <a:latin typeface="楷体"/>
+                <a:ea typeface="楷体"/>
+                <a:cs typeface="楷体"/>
+              </a:rPr>
+              <a:t>本课重点梳理</a:t>
+            </a:r>
+          </a:p>
+        </p:txBody>
+      </p:sp>
+      <p:sp>
+        <p:nvSpPr>
+          <p:cNvPr id="6" name="Rounded Rectangle 5"/>
           <p:cNvSpPr/>
           <p:nvPr/>
         </p:nvSpPr>
         <p:spPr>
           <a:xfrm>
-            <a:off x="640080" y="1371600"/>
-            <a:ext cx="10911535" cy="1170432"/>
+            <a:off x="640080" y="2194560"/>
+            <a:ext cx="5272887" cy="1783080"/>
           </a:xfrm>
           <a:prstGeom prst="roundRect">
             <a:avLst/>
@@ -4895,7 +5275,343 @@
           <a:solidFill>
             <a:srgbClr val="FFFFFF"/>
           </a:solidFill>
-          <a:ln w="22860">
+          <a:ln w="20320">
+            <a:solidFill>
+              <a:srgbClr val="B23A2A"/>
+            </a:solidFill>
+          </a:ln>
+          <a:effectLst/>
+        </p:spPr>
+        <p:style>
+          <a:lnRef idx="1">
+            <a:schemeClr val="accent1"/>
+          </a:lnRef>
+          <a:fillRef idx="3">
+            <a:schemeClr val="accent1"/>
+          </a:fillRef>
+          <a:effectRef idx="2">
+            <a:schemeClr val="accent1"/>
+          </a:effectRef>
+          <a:fontRef idx="minor">
+            <a:schemeClr val="lt1"/>
+          </a:fontRef>
+        </p:style>
+        <p:txBody>
+          <a:bodyPr rtlCol="0" anchor="ctr"/>
+          <a:lstStyle/>
+          <a:p>
+            <a:pPr algn="ctr"/>
+          </a:p>
+        </p:txBody>
+      </p:sp>
+      <p:sp>
+        <p:nvSpPr>
+          <p:cNvPr id="7" name="Oval 6"/>
+          <p:cNvSpPr/>
+          <p:nvPr/>
+        </p:nvSpPr>
+        <p:spPr>
+          <a:xfrm>
+            <a:off x="841248" y="2395728"/>
+            <a:ext cx="502920" cy="502920"/>
+          </a:xfrm>
+          <a:prstGeom prst="ellipse">
+            <a:avLst/>
+          </a:prstGeom>
+          <a:solidFill>
+            <a:srgbClr val="B23A2A"/>
+          </a:solidFill>
+          <a:ln>
+            <a:noFill/>
+          </a:ln>
+          <a:effectLst/>
+        </p:spPr>
+        <p:style>
+          <a:lnRef idx="1">
+            <a:schemeClr val="accent1"/>
+          </a:lnRef>
+          <a:fillRef idx="3">
+            <a:schemeClr val="accent1"/>
+          </a:fillRef>
+          <a:effectRef idx="2">
+            <a:schemeClr val="accent1"/>
+          </a:effectRef>
+          <a:fontRef idx="minor">
+            <a:schemeClr val="lt1"/>
+          </a:fontRef>
+        </p:style>
+        <p:txBody>
+          <a:bodyPr rtlCol="0" anchor="ctr"/>
+          <a:lstStyle/>
+          <a:p>
+            <a:pPr algn="ctr"/>
+          </a:p>
+        </p:txBody>
+      </p:sp>
+      <p:sp>
+        <p:nvSpPr>
+          <p:cNvPr id="8" name="TextBox 7"/>
+          <p:cNvSpPr txBox="1"/>
+          <p:nvPr/>
+        </p:nvSpPr>
+        <p:spPr>
+          <a:xfrm>
+            <a:off x="841248" y="2459736"/>
+            <a:ext cx="502920" cy="384048"/>
+          </a:xfrm>
+          <a:prstGeom prst="rect">
+            <a:avLst/>
+          </a:prstGeom>
+          <a:noFill/>
+        </p:spPr>
+        <p:txBody>
+          <a:bodyPr wrap="square" anchor="t" lIns="0" rIns="0" tIns="0" bIns="0">
+            <a:spAutoFit/>
+          </a:bodyPr>
+          <a:lstStyle/>
+          <a:p>
+            <a:pPr algn="ctr"/>
+            <a:r>
+              <a:rPr sz="1800" b="1">
+                <a:solidFill>
+                  <a:srgbClr val="FFFFFF"/>
+                </a:solidFill>
+                <a:latin typeface="微软雅黑"/>
+                <a:ea typeface="微软雅黑"/>
+                <a:cs typeface="微软雅黑"/>
+              </a:rPr>
+              <a:t>1</a:t>
+            </a:r>
+          </a:p>
+        </p:txBody>
+      </p:sp>
+      <p:sp>
+        <p:nvSpPr>
+          <p:cNvPr id="9" name="TextBox 8"/>
+          <p:cNvSpPr txBox="1"/>
+          <p:nvPr/>
+        </p:nvSpPr>
+        <p:spPr>
+          <a:xfrm>
+            <a:off x="1508760" y="2395728"/>
+            <a:ext cx="4221327" cy="1508760"/>
+          </a:xfrm>
+          <a:prstGeom prst="rect">
+            <a:avLst/>
+          </a:prstGeom>
+          <a:noFill/>
+        </p:spPr>
+        <p:txBody>
+          <a:bodyPr wrap="square" anchor="t" lIns="0" rIns="0" tIns="0" bIns="0">
+            <a:spAutoFit/>
+          </a:bodyPr>
+          <a:lstStyle/>
+          <a:p>
+            <a:pPr algn="l">
+              <a:lnSpc>
+                <a:spcPct val="150000"/>
+              </a:lnSpc>
+            </a:pPr>
+            <a:r>
+              <a:rPr sz="1400" b="0">
+                <a:solidFill>
+                  <a:srgbClr val="1C2A33"/>
+                </a:solidFill>
+                <a:latin typeface="楷体"/>
+                <a:ea typeface="楷体"/>
+                <a:cs typeface="楷体"/>
+              </a:rPr>
+              <a:t>① 吸水性：吸收现成水(干燥剂,物理)。</a:t>
+            </a:r>
+          </a:p>
+        </p:txBody>
+      </p:sp>
+      <p:sp>
+        <p:nvSpPr>
+          <p:cNvPr id="10" name="Rounded Rectangle 9"/>
+          <p:cNvSpPr/>
+          <p:nvPr/>
+        </p:nvSpPr>
+        <p:spPr>
+          <a:xfrm>
+            <a:off x="6278727" y="2194560"/>
+            <a:ext cx="5272887" cy="1783080"/>
+          </a:xfrm>
+          <a:prstGeom prst="roundRect">
+            <a:avLst/>
+          </a:prstGeom>
+          <a:solidFill>
+            <a:srgbClr val="FFFFFF"/>
+          </a:solidFill>
+          <a:ln w="20320">
+            <a:solidFill>
+              <a:srgbClr val="2E7D6B"/>
+            </a:solidFill>
+          </a:ln>
+          <a:effectLst/>
+        </p:spPr>
+        <p:style>
+          <a:lnRef idx="1">
+            <a:schemeClr val="accent1"/>
+          </a:lnRef>
+          <a:fillRef idx="3">
+            <a:schemeClr val="accent1"/>
+          </a:fillRef>
+          <a:effectRef idx="2">
+            <a:schemeClr val="accent1"/>
+          </a:effectRef>
+          <a:fontRef idx="minor">
+            <a:schemeClr val="lt1"/>
+          </a:fontRef>
+        </p:style>
+        <p:txBody>
+          <a:bodyPr rtlCol="0" anchor="ctr"/>
+          <a:lstStyle/>
+          <a:p>
+            <a:pPr algn="ctr"/>
+          </a:p>
+        </p:txBody>
+      </p:sp>
+      <p:sp>
+        <p:nvSpPr>
+          <p:cNvPr id="11" name="Oval 10"/>
+          <p:cNvSpPr/>
+          <p:nvPr/>
+        </p:nvSpPr>
+        <p:spPr>
+          <a:xfrm>
+            <a:off x="6479895" y="2395728"/>
+            <a:ext cx="502920" cy="502920"/>
+          </a:xfrm>
+          <a:prstGeom prst="ellipse">
+            <a:avLst/>
+          </a:prstGeom>
+          <a:solidFill>
+            <a:srgbClr val="2E7D6B"/>
+          </a:solidFill>
+          <a:ln>
+            <a:noFill/>
+          </a:ln>
+          <a:effectLst/>
+        </p:spPr>
+        <p:style>
+          <a:lnRef idx="1">
+            <a:schemeClr val="accent1"/>
+          </a:lnRef>
+          <a:fillRef idx="3">
+            <a:schemeClr val="accent1"/>
+          </a:fillRef>
+          <a:effectRef idx="2">
+            <a:schemeClr val="accent1"/>
+          </a:effectRef>
+          <a:fontRef idx="minor">
+            <a:schemeClr val="lt1"/>
+          </a:fontRef>
+        </p:style>
+        <p:txBody>
+          <a:bodyPr rtlCol="0" anchor="ctr"/>
+          <a:lstStyle/>
+          <a:p>
+            <a:pPr algn="ctr"/>
+          </a:p>
+        </p:txBody>
+      </p:sp>
+      <p:sp>
+        <p:nvSpPr>
+          <p:cNvPr id="12" name="TextBox 11"/>
+          <p:cNvSpPr txBox="1"/>
+          <p:nvPr/>
+        </p:nvSpPr>
+        <p:spPr>
+          <a:xfrm>
+            <a:off x="6479895" y="2459736"/>
+            <a:ext cx="502920" cy="384048"/>
+          </a:xfrm>
+          <a:prstGeom prst="rect">
+            <a:avLst/>
+          </a:prstGeom>
+          <a:noFill/>
+        </p:spPr>
+        <p:txBody>
+          <a:bodyPr wrap="square" anchor="t" lIns="0" rIns="0" tIns="0" bIns="0">
+            <a:spAutoFit/>
+          </a:bodyPr>
+          <a:lstStyle/>
+          <a:p>
+            <a:pPr algn="ctr"/>
+            <a:r>
+              <a:rPr sz="1800" b="1">
+                <a:solidFill>
+                  <a:srgbClr val="FFFFFF"/>
+                </a:solidFill>
+                <a:latin typeface="微软雅黑"/>
+                <a:ea typeface="微软雅黑"/>
+                <a:cs typeface="微软雅黑"/>
+              </a:rPr>
+              <a:t>2</a:t>
+            </a:r>
+          </a:p>
+        </p:txBody>
+      </p:sp>
+      <p:sp>
+        <p:nvSpPr>
+          <p:cNvPr id="13" name="TextBox 12"/>
+          <p:cNvSpPr txBox="1"/>
+          <p:nvPr/>
+        </p:nvSpPr>
+        <p:spPr>
+          <a:xfrm>
+            <a:off x="7147407" y="2395728"/>
+            <a:ext cx="4221327" cy="1508760"/>
+          </a:xfrm>
+          <a:prstGeom prst="rect">
+            <a:avLst/>
+          </a:prstGeom>
+          <a:noFill/>
+        </p:spPr>
+        <p:txBody>
+          <a:bodyPr wrap="square" anchor="t" lIns="0" rIns="0" tIns="0" bIns="0">
+            <a:spAutoFit/>
+          </a:bodyPr>
+          <a:lstStyle/>
+          <a:p>
+            <a:pPr algn="l">
+              <a:lnSpc>
+                <a:spcPct val="150000"/>
+              </a:lnSpc>
+            </a:pPr>
+            <a:r>
+              <a:rPr sz="1400" b="0">
+                <a:solidFill>
+                  <a:srgbClr val="1C2A33"/>
+                </a:solidFill>
+                <a:latin typeface="楷体"/>
+                <a:ea typeface="楷体"/>
+                <a:cs typeface="楷体"/>
+              </a:rPr>
+              <a:t>② 脱水性：将有机物H、O按2:1脱成水(炭化,化学)。</a:t>
+            </a:r>
+          </a:p>
+        </p:txBody>
+      </p:sp>
+      <p:sp>
+        <p:nvSpPr>
+          <p:cNvPr id="14" name="Rounded Rectangle 13"/>
+          <p:cNvSpPr/>
+          <p:nvPr/>
+        </p:nvSpPr>
+        <p:spPr>
+          <a:xfrm>
+            <a:off x="640080" y="4434840"/>
+            <a:ext cx="5272887" cy="1783080"/>
+          </a:xfrm>
+          <a:prstGeom prst="roundRect">
+            <a:avLst/>
+          </a:prstGeom>
+          <a:solidFill>
+            <a:srgbClr val="FFFFFF"/>
+          </a:solidFill>
+          <a:ln w="20320">
             <a:solidFill>
               <a:srgbClr val="C8A86B"/>
             </a:solidFill>
@@ -4926,107 +5642,23 @@
       </p:sp>
       <p:sp>
         <p:nvSpPr>
-          <p:cNvPr id="6" name="TextBox 5"/>
-          <p:cNvSpPr txBox="1"/>
-          <p:nvPr/>
-        </p:nvSpPr>
-        <p:spPr>
-          <a:xfrm>
-            <a:off x="1371600" y="1481328"/>
-            <a:ext cx="9997135" cy="457200"/>
-          </a:xfrm>
-          <a:prstGeom prst="rect">
-            <a:avLst/>
-          </a:prstGeom>
-          <a:noFill/>
-        </p:spPr>
-        <p:txBody>
-          <a:bodyPr wrap="square" anchor="t" lIns="0" rIns="0" tIns="0" bIns="0">
-            <a:spAutoFit/>
-          </a:bodyPr>
-          <a:lstStyle/>
-          <a:p>
-            <a:pPr algn="l">
-              <a:lnSpc>
-                <a:spcPct val="110000"/>
-              </a:lnSpc>
-            </a:pPr>
-            <a:r>
-              <a:rPr sz="1600" b="1">
-                <a:solidFill>
-                  <a:srgbClr val="1C2A33"/>
-                </a:solidFill>
-                <a:latin typeface="微软雅黑"/>
-                <a:ea typeface="微软雅黑"/>
-                <a:cs typeface="微软雅黑"/>
-              </a:rPr>
-              <a:t/>
-            </a:r>
-          </a:p>
-        </p:txBody>
-      </p:sp>
-      <p:sp>
-        <p:nvSpPr>
-          <p:cNvPr id="7" name="TextBox 6"/>
-          <p:cNvSpPr txBox="1"/>
-          <p:nvPr/>
-        </p:nvSpPr>
-        <p:spPr>
-          <a:xfrm>
-            <a:off x="1371600" y="1920240"/>
-            <a:ext cx="9997135" cy="530352"/>
-          </a:xfrm>
-          <a:prstGeom prst="rect">
-            <a:avLst/>
-          </a:prstGeom>
-          <a:noFill/>
-        </p:spPr>
-        <p:txBody>
-          <a:bodyPr wrap="square" anchor="t" lIns="0" rIns="0" tIns="0" bIns="0">
-            <a:spAutoFit/>
-          </a:bodyPr>
-          <a:lstStyle/>
-          <a:p>
-            <a:pPr algn="l">
-              <a:lnSpc>
-                <a:spcPct val="128000"/>
-              </a:lnSpc>
-            </a:pPr>
-            <a:r>
-              <a:rPr sz="1300" b="0">
-                <a:solidFill>
-                  <a:srgbClr val="1C2A33"/>
-                </a:solidFill>
-                <a:latin typeface="楷体"/>
-                <a:ea typeface="楷体"/>
-                <a:cs typeface="楷体"/>
-              </a:rPr>
-              <a:t>① 吸水性：吸收现成水(干燥剂,物理)。</a:t>
-            </a:r>
-          </a:p>
-        </p:txBody>
-      </p:sp>
-      <p:sp>
-        <p:nvSpPr>
-          <p:cNvPr id="8" name="Rounded Rectangle 7"/>
+          <p:cNvPr id="15" name="Oval 14"/>
           <p:cNvSpPr/>
           <p:nvPr/>
         </p:nvSpPr>
         <p:spPr>
           <a:xfrm>
-            <a:off x="640080" y="2651760"/>
-            <a:ext cx="10911535" cy="1170432"/>
-          </a:xfrm>
-          <a:prstGeom prst="roundRect">
+            <a:off x="841248" y="4636008"/>
+            <a:ext cx="502920" cy="502920"/>
+          </a:xfrm>
+          <a:prstGeom prst="ellipse">
             <a:avLst/>
           </a:prstGeom>
           <a:solidFill>
-            <a:srgbClr val="FFFFFF"/>
+            <a:srgbClr val="C8A86B"/>
           </a:solidFill>
-          <a:ln w="22860">
-            <a:solidFill>
-              <a:srgbClr val="C8A86B"/>
-            </a:solidFill>
+          <a:ln>
+            <a:noFill/>
           </a:ln>
           <a:effectLst/>
         </p:spPr>
@@ -5054,14 +5686,14 @@
       </p:sp>
       <p:sp>
         <p:nvSpPr>
-          <p:cNvPr id="9" name="TextBox 8"/>
+          <p:cNvPr id="16" name="TextBox 15"/>
           <p:cNvSpPr txBox="1"/>
           <p:nvPr/>
         </p:nvSpPr>
         <p:spPr>
           <a:xfrm>
-            <a:off x="1371600" y="2761488"/>
-            <a:ext cx="9997135" cy="457200"/>
+            <a:off x="841248" y="4700016"/>
+            <a:ext cx="502920" cy="384048"/>
           </a:xfrm>
           <a:prstGeom prst="rect">
             <a:avLst/>
@@ -5074,35 +5706,31 @@
           </a:bodyPr>
           <a:lstStyle/>
           <a:p>
-            <a:pPr algn="l">
-              <a:lnSpc>
-                <a:spcPct val="110000"/>
-              </a:lnSpc>
-            </a:pPr>
-            <a:r>
-              <a:rPr sz="1600" b="1">
-                <a:solidFill>
-                  <a:srgbClr val="1C2A33"/>
+            <a:pPr algn="ctr"/>
+            <a:r>
+              <a:rPr sz="1800" b="1">
+                <a:solidFill>
+                  <a:srgbClr val="FFFFFF"/>
                 </a:solidFill>
                 <a:latin typeface="微软雅黑"/>
                 <a:ea typeface="微软雅黑"/>
                 <a:cs typeface="微软雅黑"/>
               </a:rPr>
-              <a:t/>
-            </a:r>
-          </a:p>
-        </p:txBody>
-      </p:sp>
-      <p:sp>
-        <p:nvSpPr>
-          <p:cNvPr id="10" name="TextBox 9"/>
+              <a:t>3</a:t>
+            </a:r>
+          </a:p>
+        </p:txBody>
+      </p:sp>
+      <p:sp>
+        <p:nvSpPr>
+          <p:cNvPr id="17" name="TextBox 16"/>
           <p:cNvSpPr txBox="1"/>
           <p:nvPr/>
         </p:nvSpPr>
         <p:spPr>
           <a:xfrm>
-            <a:off x="1371600" y="3200400"/>
-            <a:ext cx="9997135" cy="530352"/>
+            <a:off x="1508760" y="4636008"/>
+            <a:ext cx="4221327" cy="1508760"/>
           </a:xfrm>
           <a:prstGeom prst="rect">
             <a:avLst/>
@@ -5117,11 +5745,11 @@
           <a:p>
             <a:pPr algn="l">
               <a:lnSpc>
-                <a:spcPct val="128000"/>
+                <a:spcPct val="150000"/>
               </a:lnSpc>
             </a:pPr>
             <a:r>
-              <a:rPr sz="1300" b="0">
+              <a:rPr sz="1400" b="0">
                 <a:solidFill>
                   <a:srgbClr val="1C2A33"/>
                 </a:solidFill>
@@ -5129,21 +5757,21 @@
                 <a:ea typeface="楷体"/>
                 <a:cs typeface="楷体"/>
               </a:rPr>
-              <a:t>② 脱水性：将有机物H、O按2:1脱成水(炭化,化学)。</a:t>
-            </a:r>
-          </a:p>
-        </p:txBody>
-      </p:sp>
-      <p:sp>
-        <p:nvSpPr>
-          <p:cNvPr id="11" name="Rounded Rectangle 10"/>
+              <a:t>③ 强氧化：Cu+2H2SO4(浓)=CuSO4+SO2↑+2H2O(加热)。</a:t>
+            </a:r>
+          </a:p>
+        </p:txBody>
+      </p:sp>
+      <p:sp>
+        <p:nvSpPr>
+          <p:cNvPr id="18" name="Rounded Rectangle 17"/>
           <p:cNvSpPr/>
           <p:nvPr/>
         </p:nvSpPr>
         <p:spPr>
           <a:xfrm>
-            <a:off x="640080" y="3931920"/>
-            <a:ext cx="10911535" cy="1170432"/>
+            <a:off x="6278727" y="4434840"/>
+            <a:ext cx="5272887" cy="1783080"/>
           </a:xfrm>
           <a:prstGeom prst="roundRect">
             <a:avLst/>
@@ -5151,9 +5779,9 @@
           <a:solidFill>
             <a:srgbClr val="FFFFFF"/>
           </a:solidFill>
-          <a:ln w="22860">
+          <a:ln w="20320">
             <a:solidFill>
-              <a:srgbClr val="C8A86B"/>
+              <a:srgbClr val="6B6258"/>
             </a:solidFill>
           </a:ln>
           <a:effectLst/>
@@ -5182,107 +5810,23 @@
       </p:sp>
       <p:sp>
         <p:nvSpPr>
-          <p:cNvPr id="12" name="TextBox 11"/>
-          <p:cNvSpPr txBox="1"/>
-          <p:nvPr/>
-        </p:nvSpPr>
-        <p:spPr>
-          <a:xfrm>
-            <a:off x="1371600" y="4041648"/>
-            <a:ext cx="9997135" cy="457200"/>
-          </a:xfrm>
-          <a:prstGeom prst="rect">
-            <a:avLst/>
-          </a:prstGeom>
-          <a:noFill/>
-        </p:spPr>
-        <p:txBody>
-          <a:bodyPr wrap="square" anchor="t" lIns="0" rIns="0" tIns="0" bIns="0">
-            <a:spAutoFit/>
-          </a:bodyPr>
-          <a:lstStyle/>
-          <a:p>
-            <a:pPr algn="l">
-              <a:lnSpc>
-                <a:spcPct val="110000"/>
-              </a:lnSpc>
-            </a:pPr>
-            <a:r>
-              <a:rPr sz="1600" b="1">
-                <a:solidFill>
-                  <a:srgbClr val="1C2A33"/>
-                </a:solidFill>
-                <a:latin typeface="微软雅黑"/>
-                <a:ea typeface="微软雅黑"/>
-                <a:cs typeface="微软雅黑"/>
-              </a:rPr>
-              <a:t/>
-            </a:r>
-          </a:p>
-        </p:txBody>
-      </p:sp>
-      <p:sp>
-        <p:nvSpPr>
-          <p:cNvPr id="13" name="TextBox 12"/>
-          <p:cNvSpPr txBox="1"/>
-          <p:nvPr/>
-        </p:nvSpPr>
-        <p:spPr>
-          <a:xfrm>
-            <a:off x="1371600" y="4480560"/>
-            <a:ext cx="9997135" cy="530352"/>
-          </a:xfrm>
-          <a:prstGeom prst="rect">
-            <a:avLst/>
-          </a:prstGeom>
-          <a:noFill/>
-        </p:spPr>
-        <p:txBody>
-          <a:bodyPr wrap="square" anchor="t" lIns="0" rIns="0" tIns="0" bIns="0">
-            <a:spAutoFit/>
-          </a:bodyPr>
-          <a:lstStyle/>
-          <a:p>
-            <a:pPr algn="l">
-              <a:lnSpc>
-                <a:spcPct val="128000"/>
-              </a:lnSpc>
-            </a:pPr>
-            <a:r>
-              <a:rPr sz="1300" b="0">
-                <a:solidFill>
-                  <a:srgbClr val="1C2A33"/>
-                </a:solidFill>
-                <a:latin typeface="楷体"/>
-                <a:ea typeface="楷体"/>
-                <a:cs typeface="楷体"/>
-              </a:rPr>
-              <a:t>③ 强氧化：Cu+2H2SO4(浓)=CuSO4+SO2↑+2H2O(加热)。</a:t>
-            </a:r>
-          </a:p>
-        </p:txBody>
-      </p:sp>
-      <p:sp>
-        <p:nvSpPr>
-          <p:cNvPr id="14" name="Rounded Rectangle 13"/>
+          <p:cNvPr id="19" name="Oval 18"/>
           <p:cNvSpPr/>
           <p:nvPr/>
         </p:nvSpPr>
         <p:spPr>
           <a:xfrm>
-            <a:off x="640080" y="5212080"/>
-            <a:ext cx="10911535" cy="1170432"/>
-          </a:xfrm>
-          <a:prstGeom prst="roundRect">
+            <a:off x="6479895" y="4636008"/>
+            <a:ext cx="502920" cy="502920"/>
+          </a:xfrm>
+          <a:prstGeom prst="ellipse">
             <a:avLst/>
           </a:prstGeom>
           <a:solidFill>
-            <a:srgbClr val="FFFFFF"/>
+            <a:srgbClr val="6B6258"/>
           </a:solidFill>
-          <a:ln w="22860">
-            <a:solidFill>
-              <a:srgbClr val="C8A86B"/>
-            </a:solidFill>
+          <a:ln>
+            <a:noFill/>
           </a:ln>
           <a:effectLst/>
         </p:spPr>
@@ -5310,14 +5854,14 @@
       </p:sp>
       <p:sp>
         <p:nvSpPr>
-          <p:cNvPr id="15" name="TextBox 14"/>
+          <p:cNvPr id="20" name="TextBox 19"/>
           <p:cNvSpPr txBox="1"/>
           <p:nvPr/>
         </p:nvSpPr>
         <p:spPr>
           <a:xfrm>
-            <a:off x="1371600" y="5321808"/>
-            <a:ext cx="9997135" cy="457200"/>
+            <a:off x="6479895" y="4700016"/>
+            <a:ext cx="502920" cy="384048"/>
           </a:xfrm>
           <a:prstGeom prst="rect">
             <a:avLst/>
@@ -5330,35 +5874,31 @@
           </a:bodyPr>
           <a:lstStyle/>
           <a:p>
-            <a:pPr algn="l">
-              <a:lnSpc>
-                <a:spcPct val="110000"/>
-              </a:lnSpc>
-            </a:pPr>
-            <a:r>
-              <a:rPr sz="1600" b="1">
-                <a:solidFill>
-                  <a:srgbClr val="1C2A33"/>
+            <a:pPr algn="ctr"/>
+            <a:r>
+              <a:rPr sz="1800" b="1">
+                <a:solidFill>
+                  <a:srgbClr val="FFFFFF"/>
                 </a:solidFill>
                 <a:latin typeface="微软雅黑"/>
                 <a:ea typeface="微软雅黑"/>
                 <a:cs typeface="微软雅黑"/>
               </a:rPr>
-              <a:t/>
-            </a:r>
-          </a:p>
-        </p:txBody>
-      </p:sp>
-      <p:sp>
-        <p:nvSpPr>
-          <p:cNvPr id="16" name="TextBox 15"/>
+              <a:t>4</a:t>
+            </a:r>
+          </a:p>
+        </p:txBody>
+      </p:sp>
+      <p:sp>
+        <p:nvSpPr>
+          <p:cNvPr id="21" name="TextBox 20"/>
           <p:cNvSpPr txBox="1"/>
           <p:nvPr/>
         </p:nvSpPr>
         <p:spPr>
           <a:xfrm>
-            <a:off x="1371600" y="5760720"/>
-            <a:ext cx="9997135" cy="530352"/>
+            <a:off x="7147407" y="4636008"/>
+            <a:ext cx="4221327" cy="1508760"/>
           </a:xfrm>
           <a:prstGeom prst="rect">
             <a:avLst/>
@@ -5373,11 +5913,11 @@
           <a:p>
             <a:pPr algn="l">
               <a:lnSpc>
-                <a:spcPct val="128000"/>
+                <a:spcPct val="150000"/>
               </a:lnSpc>
             </a:pPr>
             <a:r>
-              <a:rPr sz="1300" b="0">
+              <a:rPr sz="1400" b="0">
                 <a:solidFill>
                   <a:srgbClr val="1C2A33"/>
                 </a:solidFill>
@@ -5392,7 +5932,7 @@
       </p:sp>
       <p:sp>
         <p:nvSpPr>
-          <p:cNvPr id="17" name="TextBox 16"/>
+          <p:cNvPr id="22" name="TextBox 21"/>
           <p:cNvSpPr txBox="1"/>
           <p:nvPr/>
         </p:nvSpPr>
@@ -5519,13 +6059,13 @@
             <a:r>
               <a:rPr sz="1300" b="1">
                 <a:solidFill>
-                  <a:srgbClr val="2E7D6B"/>
+                  <a:srgbClr val="B23A2A"/>
                 </a:solidFill>
                 <a:latin typeface="微软雅黑"/>
                 <a:ea typeface="微软雅黑"/>
                 <a:cs typeface="微软雅黑"/>
               </a:rPr>
-              <a:t>学习路径</a:t>
+              <a:t>方法</a:t>
             </a:r>
           </a:p>
         </p:txBody>
@@ -5540,6 +6080,301 @@
           <a:xfrm>
             <a:off x="640080" y="1097280"/>
             <a:ext cx="822960" cy="30480"/>
+          </a:xfrm>
+          <a:prstGeom prst="rect">
+            <a:avLst/>
+          </a:prstGeom>
+          <a:solidFill>
+            <a:srgbClr val="B23A2A"/>
+          </a:solidFill>
+          <a:ln>
+            <a:noFill/>
+          </a:ln>
+          <a:effectLst/>
+        </p:spPr>
+        <p:style>
+          <a:lnRef idx="1">
+            <a:schemeClr val="accent1"/>
+          </a:lnRef>
+          <a:fillRef idx="3">
+            <a:schemeClr val="accent1"/>
+          </a:fillRef>
+          <a:effectRef idx="2">
+            <a:schemeClr val="accent1"/>
+          </a:effectRef>
+          <a:fontRef idx="minor">
+            <a:schemeClr val="lt1"/>
+          </a:fontRef>
+        </p:style>
+        <p:txBody>
+          <a:bodyPr rtlCol="0" anchor="ctr"/>
+          <a:lstStyle/>
+          <a:p>
+            <a:pPr algn="ctr"/>
+          </a:p>
+        </p:txBody>
+      </p:sp>
+      <p:sp>
+        <p:nvSpPr>
+          <p:cNvPr id="5" name="TextBox 4"/>
+          <p:cNvSpPr txBox="1"/>
+          <p:nvPr/>
+        </p:nvSpPr>
+        <p:spPr>
+          <a:xfrm>
+            <a:off x="640080" y="1325880"/>
+            <a:ext cx="10911535" cy="640080"/>
+          </a:xfrm>
+          <a:prstGeom prst="rect">
+            <a:avLst/>
+          </a:prstGeom>
+          <a:noFill/>
+        </p:spPr>
+        <p:txBody>
+          <a:bodyPr wrap="square" anchor="t" lIns="0" rIns="0" tIns="0" bIns="0">
+            <a:spAutoFit/>
+          </a:bodyPr>
+          <a:lstStyle/>
+          <a:p>
+            <a:pPr algn="l"/>
+            <a:r>
+              <a:rPr sz="3000" b="1">
+                <a:solidFill>
+                  <a:srgbClr val="1C2A33"/>
+                </a:solidFill>
+                <a:latin typeface="楷体"/>
+                <a:ea typeface="楷体"/>
+                <a:cs typeface="楷体"/>
+              </a:rPr>
+              <a:t>学习方法与路径</a:t>
+            </a:r>
+          </a:p>
+        </p:txBody>
+      </p:sp>
+      <p:sp>
+        <p:nvSpPr>
+          <p:cNvPr id="6" name="Rounded Rectangle 5"/>
+          <p:cNvSpPr/>
+          <p:nvPr/>
+        </p:nvSpPr>
+        <p:spPr>
+          <a:xfrm>
+            <a:off x="640080" y="2286000"/>
+            <a:ext cx="2453563" cy="3840480"/>
+          </a:xfrm>
+          <a:prstGeom prst="roundRect">
+            <a:avLst/>
+          </a:prstGeom>
+          <a:solidFill>
+            <a:srgbClr val="FFFFFF"/>
+          </a:solidFill>
+          <a:ln w="20320">
+            <a:solidFill>
+              <a:srgbClr val="B23A2A"/>
+            </a:solidFill>
+          </a:ln>
+          <a:effectLst/>
+        </p:spPr>
+        <p:style>
+          <a:lnRef idx="1">
+            <a:schemeClr val="accent1"/>
+          </a:lnRef>
+          <a:fillRef idx="3">
+            <a:schemeClr val="accent1"/>
+          </a:fillRef>
+          <a:effectRef idx="2">
+            <a:schemeClr val="accent1"/>
+          </a:effectRef>
+          <a:fontRef idx="minor">
+            <a:schemeClr val="lt1"/>
+          </a:fontRef>
+        </p:style>
+        <p:txBody>
+          <a:bodyPr rtlCol="0" anchor="ctr"/>
+          <a:lstStyle/>
+          <a:p>
+            <a:pPr algn="ctr"/>
+          </a:p>
+        </p:txBody>
+      </p:sp>
+      <p:sp>
+        <p:nvSpPr>
+          <p:cNvPr id="7" name="Rectangle 6"/>
+          <p:cNvSpPr/>
+          <p:nvPr/>
+        </p:nvSpPr>
+        <p:spPr>
+          <a:xfrm>
+            <a:off x="640080" y="2286000"/>
+            <a:ext cx="2453563" cy="548640"/>
+          </a:xfrm>
+          <a:prstGeom prst="rect">
+            <a:avLst/>
+          </a:prstGeom>
+          <a:solidFill>
+            <a:srgbClr val="B23A2A"/>
+          </a:solidFill>
+          <a:ln>
+            <a:noFill/>
+          </a:ln>
+          <a:effectLst/>
+        </p:spPr>
+        <p:style>
+          <a:lnRef idx="1">
+            <a:schemeClr val="accent1"/>
+          </a:lnRef>
+          <a:fillRef idx="3">
+            <a:schemeClr val="accent1"/>
+          </a:fillRef>
+          <a:effectRef idx="2">
+            <a:schemeClr val="accent1"/>
+          </a:effectRef>
+          <a:fontRef idx="minor">
+            <a:schemeClr val="lt1"/>
+          </a:fontRef>
+        </p:style>
+        <p:txBody>
+          <a:bodyPr rtlCol="0" anchor="ctr"/>
+          <a:lstStyle/>
+          <a:p>
+            <a:pPr algn="ctr"/>
+          </a:p>
+        </p:txBody>
+      </p:sp>
+      <p:sp>
+        <p:nvSpPr>
+          <p:cNvPr id="8" name="TextBox 7"/>
+          <p:cNvSpPr txBox="1"/>
+          <p:nvPr/>
+        </p:nvSpPr>
+        <p:spPr>
+          <a:xfrm>
+            <a:off x="640080" y="2377440"/>
+            <a:ext cx="2453563" cy="365760"/>
+          </a:xfrm>
+          <a:prstGeom prst="rect">
+            <a:avLst/>
+          </a:prstGeom>
+          <a:noFill/>
+        </p:spPr>
+        <p:txBody>
+          <a:bodyPr wrap="square" anchor="t" lIns="0" rIns="0" tIns="0" bIns="0">
+            <a:spAutoFit/>
+          </a:bodyPr>
+          <a:lstStyle/>
+          <a:p>
+            <a:pPr algn="ctr"/>
+            <a:r>
+              <a:rPr sz="1400" b="1">
+                <a:solidFill>
+                  <a:srgbClr val="FFFFFF"/>
+                </a:solidFill>
+                <a:latin typeface="微软雅黑"/>
+                <a:ea typeface="微软雅黑"/>
+                <a:cs typeface="微软雅黑"/>
+              </a:rPr>
+              <a:t>方法 1</a:t>
+            </a:r>
+          </a:p>
+        </p:txBody>
+      </p:sp>
+      <p:sp>
+        <p:nvSpPr>
+          <p:cNvPr id="9" name="TextBox 8"/>
+          <p:cNvSpPr txBox="1"/>
+          <p:nvPr/>
+        </p:nvSpPr>
+        <p:spPr>
+          <a:xfrm>
+            <a:off x="914400" y="3063240"/>
+            <a:ext cx="1904923" cy="2834640"/>
+          </a:xfrm>
+          <a:prstGeom prst="rect">
+            <a:avLst/>
+          </a:prstGeom>
+          <a:noFill/>
+        </p:spPr>
+        <p:txBody>
+          <a:bodyPr wrap="square" anchor="t" lIns="0" rIns="0" tIns="0" bIns="0">
+            <a:spAutoFit/>
+          </a:bodyPr>
+          <a:lstStyle/>
+          <a:p>
+            <a:pPr algn="l">
+              <a:lnSpc>
+                <a:spcPct val="155000"/>
+              </a:lnSpc>
+            </a:pPr>
+            <a:r>
+              <a:rPr sz="1400" b="0">
+                <a:solidFill>
+                  <a:srgbClr val="1C2A33"/>
+                </a:solidFill>
+                <a:latin typeface="楷体"/>
+                <a:ea typeface="楷体"/>
+                <a:cs typeface="楷体"/>
+              </a:rPr>
+              <a:t>实验(蔗糖炭化)。</a:t>
+            </a:r>
+          </a:p>
+        </p:txBody>
+      </p:sp>
+      <p:sp>
+        <p:nvSpPr>
+          <p:cNvPr id="10" name="Rounded Rectangle 9"/>
+          <p:cNvSpPr/>
+          <p:nvPr/>
+        </p:nvSpPr>
+        <p:spPr>
+          <a:xfrm>
+            <a:off x="3459403" y="2286000"/>
+            <a:ext cx="2453563" cy="3840480"/>
+          </a:xfrm>
+          <a:prstGeom prst="roundRect">
+            <a:avLst/>
+          </a:prstGeom>
+          <a:solidFill>
+            <a:srgbClr val="FFFFFF"/>
+          </a:solidFill>
+          <a:ln w="20320">
+            <a:solidFill>
+              <a:srgbClr val="2E7D6B"/>
+            </a:solidFill>
+          </a:ln>
+          <a:effectLst/>
+        </p:spPr>
+        <p:style>
+          <a:lnRef idx="1">
+            <a:schemeClr val="accent1"/>
+          </a:lnRef>
+          <a:fillRef idx="3">
+            <a:schemeClr val="accent1"/>
+          </a:fillRef>
+          <a:effectRef idx="2">
+            <a:schemeClr val="accent1"/>
+          </a:effectRef>
+          <a:fontRef idx="minor">
+            <a:schemeClr val="lt1"/>
+          </a:fontRef>
+        </p:style>
+        <p:txBody>
+          <a:bodyPr rtlCol="0" anchor="ctr"/>
+          <a:lstStyle/>
+          <a:p>
+            <a:pPr algn="ctr"/>
+          </a:p>
+        </p:txBody>
+      </p:sp>
+      <p:sp>
+        <p:nvSpPr>
+          <p:cNvPr id="11" name="Rectangle 10"/>
+          <p:cNvSpPr/>
+          <p:nvPr/>
+        </p:nvSpPr>
+        <p:spPr>
+          <a:xfrm>
+            <a:off x="3459403" y="2286000"/>
+            <a:ext cx="2453563" cy="548640"/>
           </a:xfrm>
           <a:prstGeom prst="rect">
             <a:avLst/>
@@ -5576,14 +6411,92 @@
       </p:sp>
       <p:sp>
         <p:nvSpPr>
-          <p:cNvPr id="5" name="Rounded Rectangle 4"/>
+          <p:cNvPr id="12" name="TextBox 11"/>
+          <p:cNvSpPr txBox="1"/>
+          <p:nvPr/>
+        </p:nvSpPr>
+        <p:spPr>
+          <a:xfrm>
+            <a:off x="3459403" y="2377440"/>
+            <a:ext cx="2453563" cy="365760"/>
+          </a:xfrm>
+          <a:prstGeom prst="rect">
+            <a:avLst/>
+          </a:prstGeom>
+          <a:noFill/>
+        </p:spPr>
+        <p:txBody>
+          <a:bodyPr wrap="square" anchor="t" lIns="0" rIns="0" tIns="0" bIns="0">
+            <a:spAutoFit/>
+          </a:bodyPr>
+          <a:lstStyle/>
+          <a:p>
+            <a:pPr algn="ctr"/>
+            <a:r>
+              <a:rPr sz="1400" b="1">
+                <a:solidFill>
+                  <a:srgbClr val="FFFFFF"/>
+                </a:solidFill>
+                <a:latin typeface="微软雅黑"/>
+                <a:ea typeface="微软雅黑"/>
+                <a:cs typeface="微软雅黑"/>
+              </a:rPr>
+              <a:t>方法 2</a:t>
+            </a:r>
+          </a:p>
+        </p:txBody>
+      </p:sp>
+      <p:sp>
+        <p:nvSpPr>
+          <p:cNvPr id="13" name="TextBox 12"/>
+          <p:cNvSpPr txBox="1"/>
+          <p:nvPr/>
+        </p:nvSpPr>
+        <p:spPr>
+          <a:xfrm>
+            <a:off x="3733723" y="3063240"/>
+            <a:ext cx="1904923" cy="2834640"/>
+          </a:xfrm>
+          <a:prstGeom prst="rect">
+            <a:avLst/>
+          </a:prstGeom>
+          <a:noFill/>
+        </p:spPr>
+        <p:txBody>
+          <a:bodyPr wrap="square" anchor="t" lIns="0" rIns="0" tIns="0" bIns="0">
+            <a:spAutoFit/>
+          </a:bodyPr>
+          <a:lstStyle/>
+          <a:p>
+            <a:pPr algn="l">
+              <a:lnSpc>
+                <a:spcPct val="155000"/>
+              </a:lnSpc>
+            </a:pPr>
+            <a:r>
+              <a:rPr sz="1400" b="0">
+                <a:solidFill>
+                  <a:srgbClr val="1C2A33"/>
+                </a:solidFill>
+                <a:latin typeface="楷体"/>
+                <a:ea typeface="楷体"/>
+                <a:cs typeface="楷体"/>
+              </a:rPr>
+              <a:t>对比(吸水/脱水)。</a:t>
+            </a:r>
+          </a:p>
+        </p:txBody>
+      </p:sp>
+      <p:sp>
+        <p:nvSpPr>
+          <p:cNvPr id="14" name="Rounded Rectangle 13"/>
           <p:cNvSpPr/>
           <p:nvPr/>
         </p:nvSpPr>
         <p:spPr>
           <a:xfrm>
-            <a:off x="640080" y="1371600"/>
-            <a:ext cx="10911535" cy="685800"/>
+            <a:off x="6278727" y="2286000"/>
+            <a:ext cx="2453563" cy="3840480"/>
           </a:xfrm>
           <a:prstGeom prst="roundRect">
             <a:avLst/>
@@ -5591,9 +6504,9 @@
           <a:solidFill>
             <a:srgbClr val="FFFFFF"/>
           </a:solidFill>
-          <a:ln w="22860">
+          <a:ln w="20320">
             <a:solidFill>
-              <a:srgbClr val="2E7D6B"/>
+              <a:srgbClr val="C8A86B"/>
             </a:solidFill>
           </a:ln>
           <a:effectLst/>
@@ -5622,20 +6535,20 @@
       </p:sp>
       <p:sp>
         <p:nvSpPr>
-          <p:cNvPr id="6" name="Oval 5"/>
+          <p:cNvPr id="15" name="Rectangle 14"/>
           <p:cNvSpPr/>
           <p:nvPr/>
         </p:nvSpPr>
         <p:spPr>
           <a:xfrm>
-            <a:off x="804672" y="1536192"/>
-            <a:ext cx="457200" cy="457200"/>
-          </a:xfrm>
-          <a:prstGeom prst="ellipse">
+            <a:off x="6278727" y="2286000"/>
+            <a:ext cx="2453563" cy="548640"/>
+          </a:xfrm>
+          <a:prstGeom prst="rect">
             <a:avLst/>
           </a:prstGeom>
           <a:solidFill>
-            <a:srgbClr val="2E7D6B"/>
+            <a:srgbClr val="C8A86B"/>
           </a:solidFill>
           <a:ln>
             <a:noFill/>
@@ -5666,14 +6579,14 @@
       </p:sp>
       <p:sp>
         <p:nvSpPr>
-          <p:cNvPr id="7" name="TextBox 6"/>
+          <p:cNvPr id="16" name="TextBox 15"/>
           <p:cNvSpPr txBox="1"/>
           <p:nvPr/>
         </p:nvSpPr>
         <p:spPr>
           <a:xfrm>
-            <a:off x="804672" y="1591056"/>
-            <a:ext cx="457200" cy="384048"/>
+            <a:off x="6278727" y="2377440"/>
+            <a:ext cx="2453563" cy="365760"/>
           </a:xfrm>
           <a:prstGeom prst="rect">
             <a:avLst/>
@@ -5688,7 +6601,7 @@
           <a:p>
             <a:pPr algn="ctr"/>
             <a:r>
-              <a:rPr sz="1600" b="1">
+              <a:rPr sz="1400" b="1">
                 <a:solidFill>
                   <a:srgbClr val="FFFFFF"/>
                 </a:solidFill>
@@ -5696,21 +6609,21 @@
                 <a:ea typeface="微软雅黑"/>
                 <a:cs typeface="微软雅黑"/>
               </a:rPr>
-              <a:t>1</a:t>
-            </a:r>
-          </a:p>
-        </p:txBody>
-      </p:sp>
-      <p:sp>
-        <p:nvSpPr>
-          <p:cNvPr id="8" name="TextBox 7"/>
+              <a:t>方法 3</a:t>
+            </a:r>
+          </a:p>
+        </p:txBody>
+      </p:sp>
+      <p:sp>
+        <p:nvSpPr>
+          <p:cNvPr id="17" name="TextBox 16"/>
           <p:cNvSpPr txBox="1"/>
           <p:nvPr/>
         </p:nvSpPr>
         <p:spPr>
           <a:xfrm>
-            <a:off x="1371600" y="1481328"/>
-            <a:ext cx="9997135" cy="484632"/>
+            <a:off x="6553047" y="3063240"/>
+            <a:ext cx="1904923" cy="2834640"/>
           </a:xfrm>
           <a:prstGeom prst="rect">
             <a:avLst/>
@@ -5725,33 +6638,33 @@
           <a:p>
             <a:pPr algn="l">
               <a:lnSpc>
-                <a:spcPct val="110000"/>
+                <a:spcPct val="155000"/>
               </a:lnSpc>
             </a:pPr>
             <a:r>
-              <a:rPr sz="1600" b="1">
+              <a:rPr sz="1400" b="0">
                 <a:solidFill>
                   <a:srgbClr val="1C2A33"/>
                 </a:solidFill>
-                <a:latin typeface="微软雅黑"/>
-                <a:ea typeface="微软雅黑"/>
-                <a:cs typeface="微软雅黑"/>
+                <a:latin typeface="楷体"/>
+                <a:ea typeface="楷体"/>
+                <a:cs typeface="楷体"/>
               </a:rPr>
-              <a:t>Step 1 导入</a:t>
-            </a:r>
-          </a:p>
-        </p:txBody>
-      </p:sp>
-      <p:sp>
-        <p:nvSpPr>
-          <p:cNvPr id="9" name="Rounded Rectangle 8"/>
+              <a:t>Cu与浓H2SO4演示。</a:t>
+            </a:r>
+          </a:p>
+        </p:txBody>
+      </p:sp>
+      <p:sp>
+        <p:nvSpPr>
+          <p:cNvPr id="18" name="Rounded Rectangle 17"/>
           <p:cNvSpPr/>
           <p:nvPr/>
         </p:nvSpPr>
         <p:spPr>
           <a:xfrm>
-            <a:off x="640080" y="2194560"/>
-            <a:ext cx="10911535" cy="685800"/>
+            <a:off x="9098051" y="2286000"/>
+            <a:ext cx="2453563" cy="3840480"/>
           </a:xfrm>
           <a:prstGeom prst="roundRect">
             <a:avLst/>
@@ -5759,9 +6672,9 @@
           <a:solidFill>
             <a:srgbClr val="FFFFFF"/>
           </a:solidFill>
-          <a:ln w="22860">
+          <a:ln w="20320">
             <a:solidFill>
-              <a:srgbClr val="2E7D6B"/>
+              <a:srgbClr val="6B6258"/>
             </a:solidFill>
           </a:ln>
           <a:effectLst/>
@@ -5790,20 +6703,20 @@
       </p:sp>
       <p:sp>
         <p:nvSpPr>
-          <p:cNvPr id="10" name="Oval 9"/>
+          <p:cNvPr id="19" name="Rectangle 18"/>
           <p:cNvSpPr/>
           <p:nvPr/>
         </p:nvSpPr>
         <p:spPr>
           <a:xfrm>
-            <a:off x="804672" y="2359152"/>
-            <a:ext cx="457200" cy="457200"/>
-          </a:xfrm>
-          <a:prstGeom prst="ellipse">
+            <a:off x="9098051" y="2286000"/>
+            <a:ext cx="2453563" cy="548640"/>
+          </a:xfrm>
+          <a:prstGeom prst="rect">
             <a:avLst/>
           </a:prstGeom>
           <a:solidFill>
-            <a:srgbClr val="2E7D6B"/>
+            <a:srgbClr val="6B6258"/>
           </a:solidFill>
           <a:ln>
             <a:noFill/>
@@ -5834,14 +6747,14 @@
       </p:sp>
       <p:sp>
         <p:nvSpPr>
-          <p:cNvPr id="11" name="TextBox 10"/>
+          <p:cNvPr id="20" name="TextBox 19"/>
           <p:cNvSpPr txBox="1"/>
           <p:nvPr/>
         </p:nvSpPr>
         <p:spPr>
           <a:xfrm>
-            <a:off x="804672" y="2414016"/>
-            <a:ext cx="457200" cy="384048"/>
+            <a:off x="9098051" y="2377440"/>
+            <a:ext cx="2453563" cy="365760"/>
           </a:xfrm>
           <a:prstGeom prst="rect">
             <a:avLst/>
@@ -5856,7 +6769,7 @@
           <a:p>
             <a:pPr algn="ctr"/>
             <a:r>
-              <a:rPr sz="1600" b="1">
+              <a:rPr sz="1400" b="1">
                 <a:solidFill>
                   <a:srgbClr val="FFFFFF"/>
                 </a:solidFill>
@@ -5864,21 +6777,21 @@
                 <a:ea typeface="微软雅黑"/>
                 <a:cs typeface="微软雅黑"/>
               </a:rPr>
-              <a:t>2</a:t>
-            </a:r>
-          </a:p>
-        </p:txBody>
-      </p:sp>
-      <p:sp>
-        <p:nvSpPr>
-          <p:cNvPr id="12" name="TextBox 11"/>
+              <a:t>方法 4</a:t>
+            </a:r>
+          </a:p>
+        </p:txBody>
+      </p:sp>
+      <p:sp>
+        <p:nvSpPr>
+          <p:cNvPr id="21" name="TextBox 20"/>
           <p:cNvSpPr txBox="1"/>
           <p:nvPr/>
         </p:nvSpPr>
         <p:spPr>
           <a:xfrm>
-            <a:off x="1371600" y="2304288"/>
-            <a:ext cx="9997135" cy="484632"/>
+            <a:off x="9372371" y="3063240"/>
+            <a:ext cx="1904923" cy="2834640"/>
           </a:xfrm>
           <a:prstGeom prst="rect">
             <a:avLst/>
@@ -5893,698 +6806,26 @@
           <a:p>
             <a:pPr algn="l">
               <a:lnSpc>
-                <a:spcPct val="110000"/>
+                <a:spcPct val="155000"/>
               </a:lnSpc>
             </a:pPr>
             <a:r>
-              <a:rPr sz="1600" b="1">
+              <a:rPr sz="1400" b="0">
                 <a:solidFill>
                   <a:srgbClr val="1C2A33"/>
                 </a:solidFill>
-                <a:latin typeface="微软雅黑"/>
-                <a:ea typeface="微软雅黑"/>
-                <a:cs typeface="微软雅黑"/>
+                <a:latin typeface="楷体"/>
+                <a:ea typeface="楷体"/>
+                <a:cs typeface="楷体"/>
               </a:rPr>
-              <a:t>Step 2 吸水性</a:t>
-            </a:r>
-          </a:p>
-        </p:txBody>
-      </p:sp>
-      <p:sp>
-        <p:nvSpPr>
-          <p:cNvPr id="13" name="Rounded Rectangle 12"/>
-          <p:cNvSpPr/>
-          <p:nvPr/>
-        </p:nvSpPr>
-        <p:spPr>
-          <a:xfrm>
-            <a:off x="640080" y="3017520"/>
-            <a:ext cx="10911535" cy="685800"/>
-          </a:xfrm>
-          <a:prstGeom prst="roundRect">
-            <a:avLst/>
-          </a:prstGeom>
-          <a:solidFill>
-            <a:srgbClr val="FFFFFF"/>
-          </a:solidFill>
-          <a:ln w="22860">
-            <a:solidFill>
-              <a:srgbClr val="2E7D6B"/>
-            </a:solidFill>
-          </a:ln>
-          <a:effectLst/>
-        </p:spPr>
-        <p:style>
-          <a:lnRef idx="1">
-            <a:schemeClr val="accent1"/>
-          </a:lnRef>
-          <a:fillRef idx="3">
-            <a:schemeClr val="accent1"/>
-          </a:fillRef>
-          <a:effectRef idx="2">
-            <a:schemeClr val="accent1"/>
-          </a:effectRef>
-          <a:fontRef idx="minor">
-            <a:schemeClr val="lt1"/>
-          </a:fontRef>
-        </p:style>
-        <p:txBody>
-          <a:bodyPr rtlCol="0" anchor="ctr"/>
-          <a:lstStyle/>
-          <a:p>
-            <a:pPr algn="ctr"/>
-          </a:p>
-        </p:txBody>
-      </p:sp>
-      <p:sp>
-        <p:nvSpPr>
-          <p:cNvPr id="14" name="Oval 13"/>
-          <p:cNvSpPr/>
-          <p:nvPr/>
-        </p:nvSpPr>
-        <p:spPr>
-          <a:xfrm>
-            <a:off x="804672" y="3182112"/>
-            <a:ext cx="457200" cy="457200"/>
-          </a:xfrm>
-          <a:prstGeom prst="ellipse">
-            <a:avLst/>
-          </a:prstGeom>
-          <a:solidFill>
-            <a:srgbClr val="2E7D6B"/>
-          </a:solidFill>
-          <a:ln>
-            <a:noFill/>
-          </a:ln>
-          <a:effectLst/>
-        </p:spPr>
-        <p:style>
-          <a:lnRef idx="1">
-            <a:schemeClr val="accent1"/>
-          </a:lnRef>
-          <a:fillRef idx="3">
-            <a:schemeClr val="accent1"/>
-          </a:fillRef>
-          <a:effectRef idx="2">
-            <a:schemeClr val="accent1"/>
-          </a:effectRef>
-          <a:fontRef idx="minor">
-            <a:schemeClr val="lt1"/>
-          </a:fontRef>
-        </p:style>
-        <p:txBody>
-          <a:bodyPr rtlCol="0" anchor="ctr"/>
-          <a:lstStyle/>
-          <a:p>
-            <a:pPr algn="ctr"/>
-          </a:p>
-        </p:txBody>
-      </p:sp>
-      <p:sp>
-        <p:nvSpPr>
-          <p:cNvPr id="15" name="TextBox 14"/>
-          <p:cNvSpPr txBox="1"/>
-          <p:nvPr/>
-        </p:nvSpPr>
-        <p:spPr>
-          <a:xfrm>
-            <a:off x="804672" y="3236976"/>
-            <a:ext cx="457200" cy="384048"/>
-          </a:xfrm>
-          <a:prstGeom prst="rect">
-            <a:avLst/>
-          </a:prstGeom>
-          <a:noFill/>
-        </p:spPr>
-        <p:txBody>
-          <a:bodyPr wrap="square" anchor="t" lIns="0" rIns="0" tIns="0" bIns="0">
-            <a:spAutoFit/>
-          </a:bodyPr>
-          <a:lstStyle/>
-          <a:p>
-            <a:pPr algn="ctr"/>
-            <a:r>
-              <a:rPr sz="1600" b="1">
-                <a:solidFill>
-                  <a:srgbClr val="FFFFFF"/>
-                </a:solidFill>
-                <a:latin typeface="微软雅黑"/>
-                <a:ea typeface="微软雅黑"/>
-                <a:cs typeface="微软雅黑"/>
-              </a:rPr>
-              <a:t>3</a:t>
-            </a:r>
-          </a:p>
-        </p:txBody>
-      </p:sp>
-      <p:sp>
-        <p:nvSpPr>
-          <p:cNvPr id="16" name="TextBox 15"/>
-          <p:cNvSpPr txBox="1"/>
-          <p:nvPr/>
-        </p:nvSpPr>
-        <p:spPr>
-          <a:xfrm>
-            <a:off x="1371600" y="3127248"/>
-            <a:ext cx="9997135" cy="484632"/>
-          </a:xfrm>
-          <a:prstGeom prst="rect">
-            <a:avLst/>
-          </a:prstGeom>
-          <a:noFill/>
-        </p:spPr>
-        <p:txBody>
-          <a:bodyPr wrap="square" anchor="t" lIns="0" rIns="0" tIns="0" bIns="0">
-            <a:spAutoFit/>
-          </a:bodyPr>
-          <a:lstStyle/>
-          <a:p>
-            <a:pPr algn="l">
-              <a:lnSpc>
-                <a:spcPct val="110000"/>
-              </a:lnSpc>
-            </a:pPr>
-            <a:r>
-              <a:rPr sz="1600" b="1">
-                <a:solidFill>
-                  <a:srgbClr val="1C2A33"/>
-                </a:solidFill>
-                <a:latin typeface="微软雅黑"/>
-                <a:ea typeface="微软雅黑"/>
-                <a:cs typeface="微软雅黑"/>
-              </a:rPr>
-              <a:t>Step 3 脱水性</a:t>
-            </a:r>
-          </a:p>
-        </p:txBody>
-      </p:sp>
-      <p:sp>
-        <p:nvSpPr>
-          <p:cNvPr id="17" name="Rounded Rectangle 16"/>
-          <p:cNvSpPr/>
-          <p:nvPr/>
-        </p:nvSpPr>
-        <p:spPr>
-          <a:xfrm>
-            <a:off x="640080" y="3840480"/>
-            <a:ext cx="10911535" cy="685800"/>
-          </a:xfrm>
-          <a:prstGeom prst="roundRect">
-            <a:avLst/>
-          </a:prstGeom>
-          <a:solidFill>
-            <a:srgbClr val="FFFFFF"/>
-          </a:solidFill>
-          <a:ln w="22860">
-            <a:solidFill>
-              <a:srgbClr val="2E7D6B"/>
-            </a:solidFill>
-          </a:ln>
-          <a:effectLst/>
-        </p:spPr>
-        <p:style>
-          <a:lnRef idx="1">
-            <a:schemeClr val="accent1"/>
-          </a:lnRef>
-          <a:fillRef idx="3">
-            <a:schemeClr val="accent1"/>
-          </a:fillRef>
-          <a:effectRef idx="2">
-            <a:schemeClr val="accent1"/>
-          </a:effectRef>
-          <a:fontRef idx="minor">
-            <a:schemeClr val="lt1"/>
-          </a:fontRef>
-        </p:style>
-        <p:txBody>
-          <a:bodyPr rtlCol="0" anchor="ctr"/>
-          <a:lstStyle/>
-          <a:p>
-            <a:pPr algn="ctr"/>
-          </a:p>
-        </p:txBody>
-      </p:sp>
-      <p:sp>
-        <p:nvSpPr>
-          <p:cNvPr id="18" name="Oval 17"/>
-          <p:cNvSpPr/>
-          <p:nvPr/>
-        </p:nvSpPr>
-        <p:spPr>
-          <a:xfrm>
-            <a:off x="804672" y="4005072"/>
-            <a:ext cx="457200" cy="457200"/>
-          </a:xfrm>
-          <a:prstGeom prst="ellipse">
-            <a:avLst/>
-          </a:prstGeom>
-          <a:solidFill>
-            <a:srgbClr val="2E7D6B"/>
-          </a:solidFill>
-          <a:ln>
-            <a:noFill/>
-          </a:ln>
-          <a:effectLst/>
-        </p:spPr>
-        <p:style>
-          <a:lnRef idx="1">
-            <a:schemeClr val="accent1"/>
-          </a:lnRef>
-          <a:fillRef idx="3">
-            <a:schemeClr val="accent1"/>
-          </a:fillRef>
-          <a:effectRef idx="2">
-            <a:schemeClr val="accent1"/>
-          </a:effectRef>
-          <a:fontRef idx="minor">
-            <a:schemeClr val="lt1"/>
-          </a:fontRef>
-        </p:style>
-        <p:txBody>
-          <a:bodyPr rtlCol="0" anchor="ctr"/>
-          <a:lstStyle/>
-          <a:p>
-            <a:pPr algn="ctr"/>
-          </a:p>
-        </p:txBody>
-      </p:sp>
-      <p:sp>
-        <p:nvSpPr>
-          <p:cNvPr id="19" name="TextBox 18"/>
-          <p:cNvSpPr txBox="1"/>
-          <p:nvPr/>
-        </p:nvSpPr>
-        <p:spPr>
-          <a:xfrm>
-            <a:off x="804672" y="4059936"/>
-            <a:ext cx="457200" cy="384048"/>
-          </a:xfrm>
-          <a:prstGeom prst="rect">
-            <a:avLst/>
-          </a:prstGeom>
-          <a:noFill/>
-        </p:spPr>
-        <p:txBody>
-          <a:bodyPr wrap="square" anchor="t" lIns="0" rIns="0" tIns="0" bIns="0">
-            <a:spAutoFit/>
-          </a:bodyPr>
-          <a:lstStyle/>
-          <a:p>
-            <a:pPr algn="ctr"/>
-            <a:r>
-              <a:rPr sz="1600" b="1">
-                <a:solidFill>
-                  <a:srgbClr val="FFFFFF"/>
-                </a:solidFill>
-                <a:latin typeface="微软雅黑"/>
-                <a:ea typeface="微软雅黑"/>
-                <a:cs typeface="微软雅黑"/>
-              </a:rPr>
-              <a:t>4</a:t>
-            </a:r>
-          </a:p>
-        </p:txBody>
-      </p:sp>
-      <p:sp>
-        <p:nvSpPr>
-          <p:cNvPr id="20" name="TextBox 19"/>
-          <p:cNvSpPr txBox="1"/>
-          <p:nvPr/>
-        </p:nvSpPr>
-        <p:spPr>
-          <a:xfrm>
-            <a:off x="1371600" y="3950208"/>
-            <a:ext cx="9997135" cy="484632"/>
-          </a:xfrm>
-          <a:prstGeom prst="rect">
-            <a:avLst/>
-          </a:prstGeom>
-          <a:noFill/>
-        </p:spPr>
-        <p:txBody>
-          <a:bodyPr wrap="square" anchor="t" lIns="0" rIns="0" tIns="0" bIns="0">
-            <a:spAutoFit/>
-          </a:bodyPr>
-          <a:lstStyle/>
-          <a:p>
-            <a:pPr algn="l">
-              <a:lnSpc>
-                <a:spcPct val="110000"/>
-              </a:lnSpc>
-            </a:pPr>
-            <a:r>
-              <a:rPr sz="1600" b="1">
-                <a:solidFill>
-                  <a:srgbClr val="1C2A33"/>
-                </a:solidFill>
-                <a:latin typeface="微软雅黑"/>
-                <a:ea typeface="微软雅黑"/>
-                <a:cs typeface="微软雅黑"/>
-              </a:rPr>
-              <a:t>Step 4 强氧化性</a:t>
-            </a:r>
-          </a:p>
-        </p:txBody>
-      </p:sp>
-      <p:sp>
-        <p:nvSpPr>
-          <p:cNvPr id="21" name="Rounded Rectangle 20"/>
-          <p:cNvSpPr/>
-          <p:nvPr/>
-        </p:nvSpPr>
-        <p:spPr>
-          <a:xfrm>
-            <a:off x="640080" y="4663440"/>
-            <a:ext cx="10911535" cy="685800"/>
-          </a:xfrm>
-          <a:prstGeom prst="roundRect">
-            <a:avLst/>
-          </a:prstGeom>
-          <a:solidFill>
-            <a:srgbClr val="FFFFFF"/>
-          </a:solidFill>
-          <a:ln w="22860">
-            <a:solidFill>
-              <a:srgbClr val="2E7D6B"/>
-            </a:solidFill>
-          </a:ln>
-          <a:effectLst/>
-        </p:spPr>
-        <p:style>
-          <a:lnRef idx="1">
-            <a:schemeClr val="accent1"/>
-          </a:lnRef>
-          <a:fillRef idx="3">
-            <a:schemeClr val="accent1"/>
-          </a:fillRef>
-          <a:effectRef idx="2">
-            <a:schemeClr val="accent1"/>
-          </a:effectRef>
-          <a:fontRef idx="minor">
-            <a:schemeClr val="lt1"/>
-          </a:fontRef>
-        </p:style>
-        <p:txBody>
-          <a:bodyPr rtlCol="0" anchor="ctr"/>
-          <a:lstStyle/>
-          <a:p>
-            <a:pPr algn="ctr"/>
-          </a:p>
-        </p:txBody>
-      </p:sp>
-      <p:sp>
-        <p:nvSpPr>
-          <p:cNvPr id="22" name="Oval 21"/>
-          <p:cNvSpPr/>
-          <p:nvPr/>
-        </p:nvSpPr>
-        <p:spPr>
-          <a:xfrm>
-            <a:off x="804672" y="4828032"/>
-            <a:ext cx="457200" cy="457200"/>
-          </a:xfrm>
-          <a:prstGeom prst="ellipse">
-            <a:avLst/>
-          </a:prstGeom>
-          <a:solidFill>
-            <a:srgbClr val="2E7D6B"/>
-          </a:solidFill>
-          <a:ln>
-            <a:noFill/>
-          </a:ln>
-          <a:effectLst/>
-        </p:spPr>
-        <p:style>
-          <a:lnRef idx="1">
-            <a:schemeClr val="accent1"/>
-          </a:lnRef>
-          <a:fillRef idx="3">
-            <a:schemeClr val="accent1"/>
-          </a:fillRef>
-          <a:effectRef idx="2">
-            <a:schemeClr val="accent1"/>
-          </a:effectRef>
-          <a:fontRef idx="minor">
-            <a:schemeClr val="lt1"/>
-          </a:fontRef>
-        </p:style>
-        <p:txBody>
-          <a:bodyPr rtlCol="0" anchor="ctr"/>
-          <a:lstStyle/>
-          <a:p>
-            <a:pPr algn="ctr"/>
-          </a:p>
-        </p:txBody>
-      </p:sp>
-      <p:sp>
-        <p:nvSpPr>
-          <p:cNvPr id="23" name="TextBox 22"/>
-          <p:cNvSpPr txBox="1"/>
-          <p:nvPr/>
-        </p:nvSpPr>
-        <p:spPr>
-          <a:xfrm>
-            <a:off x="804672" y="4882896"/>
-            <a:ext cx="457200" cy="384048"/>
-          </a:xfrm>
-          <a:prstGeom prst="rect">
-            <a:avLst/>
-          </a:prstGeom>
-          <a:noFill/>
-        </p:spPr>
-        <p:txBody>
-          <a:bodyPr wrap="square" anchor="t" lIns="0" rIns="0" tIns="0" bIns="0">
-            <a:spAutoFit/>
-          </a:bodyPr>
-          <a:lstStyle/>
-          <a:p>
-            <a:pPr algn="ctr"/>
-            <a:r>
-              <a:rPr sz="1600" b="1">
-                <a:solidFill>
-                  <a:srgbClr val="FFFFFF"/>
-                </a:solidFill>
-                <a:latin typeface="微软雅黑"/>
-                <a:ea typeface="微软雅黑"/>
-                <a:cs typeface="微软雅黑"/>
-              </a:rPr>
-              <a:t>5</a:t>
-            </a:r>
-          </a:p>
-        </p:txBody>
-      </p:sp>
-      <p:sp>
-        <p:nvSpPr>
-          <p:cNvPr id="24" name="TextBox 23"/>
-          <p:cNvSpPr txBox="1"/>
-          <p:nvPr/>
-        </p:nvSpPr>
-        <p:spPr>
-          <a:xfrm>
-            <a:off x="1371600" y="4773168"/>
-            <a:ext cx="9997135" cy="484632"/>
-          </a:xfrm>
-          <a:prstGeom prst="rect">
-            <a:avLst/>
-          </a:prstGeom>
-          <a:noFill/>
-        </p:spPr>
-        <p:txBody>
-          <a:bodyPr wrap="square" anchor="t" lIns="0" rIns="0" tIns="0" bIns="0">
-            <a:spAutoFit/>
-          </a:bodyPr>
-          <a:lstStyle/>
-          <a:p>
-            <a:pPr algn="l">
-              <a:lnSpc>
-                <a:spcPct val="110000"/>
-              </a:lnSpc>
-            </a:pPr>
-            <a:r>
-              <a:rPr sz="1600" b="1">
-                <a:solidFill>
-                  <a:srgbClr val="1C2A33"/>
-                </a:solidFill>
-                <a:latin typeface="微软雅黑"/>
-                <a:ea typeface="微软雅黑"/>
-                <a:cs typeface="微软雅黑"/>
-              </a:rPr>
-              <a:t>Step 5 稀释操作</a:t>
-            </a:r>
-          </a:p>
-        </p:txBody>
-      </p:sp>
-      <p:sp>
-        <p:nvSpPr>
-          <p:cNvPr id="25" name="Rounded Rectangle 24"/>
-          <p:cNvSpPr/>
-          <p:nvPr/>
-        </p:nvSpPr>
-        <p:spPr>
-          <a:xfrm>
-            <a:off x="640080" y="5486400"/>
-            <a:ext cx="10911535" cy="685800"/>
-          </a:xfrm>
-          <a:prstGeom prst="roundRect">
-            <a:avLst/>
-          </a:prstGeom>
-          <a:solidFill>
-            <a:srgbClr val="FFFFFF"/>
-          </a:solidFill>
-          <a:ln w="22860">
-            <a:solidFill>
-              <a:srgbClr val="2E7D6B"/>
-            </a:solidFill>
-          </a:ln>
-          <a:effectLst/>
-        </p:spPr>
-        <p:style>
-          <a:lnRef idx="1">
-            <a:schemeClr val="accent1"/>
-          </a:lnRef>
-          <a:fillRef idx="3">
-            <a:schemeClr val="accent1"/>
-          </a:fillRef>
-          <a:effectRef idx="2">
-            <a:schemeClr val="accent1"/>
-          </a:effectRef>
-          <a:fontRef idx="minor">
-            <a:schemeClr val="lt1"/>
-          </a:fontRef>
-        </p:style>
-        <p:txBody>
-          <a:bodyPr rtlCol="0" anchor="ctr"/>
-          <a:lstStyle/>
-          <a:p>
-            <a:pPr algn="ctr"/>
-          </a:p>
-        </p:txBody>
-      </p:sp>
-      <p:sp>
-        <p:nvSpPr>
-          <p:cNvPr id="26" name="Oval 25"/>
-          <p:cNvSpPr/>
-          <p:nvPr/>
-        </p:nvSpPr>
-        <p:spPr>
-          <a:xfrm>
-            <a:off x="804672" y="5650992"/>
-            <a:ext cx="457200" cy="457200"/>
-          </a:xfrm>
-          <a:prstGeom prst="ellipse">
-            <a:avLst/>
-          </a:prstGeom>
-          <a:solidFill>
-            <a:srgbClr val="2E7D6B"/>
-          </a:solidFill>
-          <a:ln>
-            <a:noFill/>
-          </a:ln>
-          <a:effectLst/>
-        </p:spPr>
-        <p:style>
-          <a:lnRef idx="1">
-            <a:schemeClr val="accent1"/>
-          </a:lnRef>
-          <a:fillRef idx="3">
-            <a:schemeClr val="accent1"/>
-          </a:fillRef>
-          <a:effectRef idx="2">
-            <a:schemeClr val="accent1"/>
-          </a:effectRef>
-          <a:fontRef idx="minor">
-            <a:schemeClr val="lt1"/>
-          </a:fontRef>
-        </p:style>
-        <p:txBody>
-          <a:bodyPr rtlCol="0" anchor="ctr"/>
-          <a:lstStyle/>
-          <a:p>
-            <a:pPr algn="ctr"/>
-          </a:p>
-        </p:txBody>
-      </p:sp>
-      <p:sp>
-        <p:nvSpPr>
-          <p:cNvPr id="27" name="TextBox 26"/>
-          <p:cNvSpPr txBox="1"/>
-          <p:nvPr/>
-        </p:nvSpPr>
-        <p:spPr>
-          <a:xfrm>
-            <a:off x="804672" y="5705856"/>
-            <a:ext cx="457200" cy="384048"/>
-          </a:xfrm>
-          <a:prstGeom prst="rect">
-            <a:avLst/>
-          </a:prstGeom>
-          <a:noFill/>
-        </p:spPr>
-        <p:txBody>
-          <a:bodyPr wrap="square" anchor="t" lIns="0" rIns="0" tIns="0" bIns="0">
-            <a:spAutoFit/>
-          </a:bodyPr>
-          <a:lstStyle/>
-          <a:p>
-            <a:pPr algn="ctr"/>
-            <a:r>
-              <a:rPr sz="1600" b="1">
-                <a:solidFill>
-                  <a:srgbClr val="FFFFFF"/>
-                </a:solidFill>
-                <a:latin typeface="微软雅黑"/>
-                <a:ea typeface="微软雅黑"/>
-                <a:cs typeface="微软雅黑"/>
-              </a:rPr>
-              <a:t>6</a:t>
-            </a:r>
-          </a:p>
-        </p:txBody>
-      </p:sp>
-      <p:sp>
-        <p:nvSpPr>
-          <p:cNvPr id="28" name="TextBox 27"/>
-          <p:cNvSpPr txBox="1"/>
-          <p:nvPr/>
-        </p:nvSpPr>
-        <p:spPr>
-          <a:xfrm>
-            <a:off x="1371600" y="5596128"/>
-            <a:ext cx="9997135" cy="484632"/>
-          </a:xfrm>
-          <a:prstGeom prst="rect">
-            <a:avLst/>
-          </a:prstGeom>
-          <a:noFill/>
-        </p:spPr>
-        <p:txBody>
-          <a:bodyPr wrap="square" anchor="t" lIns="0" rIns="0" tIns="0" bIns="0">
-            <a:spAutoFit/>
-          </a:bodyPr>
-          <a:lstStyle/>
-          <a:p>
-            <a:pPr algn="l">
-              <a:lnSpc>
-                <a:spcPct val="110000"/>
-              </a:lnSpc>
-            </a:pPr>
-            <a:r>
-              <a:rPr sz="1600" b="1">
-                <a:solidFill>
-                  <a:srgbClr val="1C2A33"/>
-                </a:solidFill>
-                <a:latin typeface="微软雅黑"/>
-                <a:ea typeface="微软雅黑"/>
-                <a:cs typeface="微软雅黑"/>
-              </a:rPr>
-              <a:t>Step 6 练习+作业</a:t>
-            </a:r>
-          </a:p>
-        </p:txBody>
-      </p:sp>
-      <p:sp>
-        <p:nvSpPr>
-          <p:cNvPr id="29" name="TextBox 28"/>
+              <a:t>安全操作。</a:t>
+            </a:r>
+          </a:p>
+        </p:txBody>
+      </p:sp>
+      <p:sp>
+        <p:nvSpPr>
+          <p:cNvPr id="22" name="TextBox 21"/>
           <p:cNvSpPr txBox="1"/>
           <p:nvPr/>
         </p:nvSpPr>
@@ -6717,7 +6958,7 @@
                 <a:ea typeface="微软雅黑"/>
                 <a:cs typeface="微软雅黑"/>
               </a:rPr>
-              <a:t>易混易错</a:t>
+              <a:t>难点</a:t>
             </a:r>
           </a:p>
         </p:txBody>
@@ -6768,14 +7009,51 @@
       </p:sp>
       <p:sp>
         <p:nvSpPr>
-          <p:cNvPr id="5" name="Rounded Rectangle 4"/>
+          <p:cNvPr id="5" name="TextBox 4"/>
+          <p:cNvSpPr txBox="1"/>
+          <p:nvPr/>
+        </p:nvSpPr>
+        <p:spPr>
+          <a:xfrm>
+            <a:off x="640080" y="1325880"/>
+            <a:ext cx="10911535" cy="640080"/>
+          </a:xfrm>
+          <a:prstGeom prst="rect">
+            <a:avLst/>
+          </a:prstGeom>
+          <a:noFill/>
+        </p:spPr>
+        <p:txBody>
+          <a:bodyPr wrap="square" anchor="t" lIns="0" rIns="0" tIns="0" bIns="0">
+            <a:spAutoFit/>
+          </a:bodyPr>
+          <a:lstStyle/>
+          <a:p>
+            <a:pPr algn="l"/>
+            <a:r>
+              <a:rPr sz="3000" b="1">
+                <a:solidFill>
+                  <a:srgbClr val="1C2A33"/>
+                </a:solidFill>
+                <a:latin typeface="楷体"/>
+                <a:ea typeface="楷体"/>
+                <a:cs typeface="楷体"/>
+              </a:rPr>
+              <a:t>容易卡住的地方</a:t>
+            </a:r>
+          </a:p>
+        </p:txBody>
+      </p:sp>
+      <p:sp>
+        <p:nvSpPr>
+          <p:cNvPr id="6" name="Rounded Rectangle 5"/>
           <p:cNvSpPr/>
           <p:nvPr/>
         </p:nvSpPr>
         <p:spPr>
           <a:xfrm>
-            <a:off x="640080" y="1417320"/>
-            <a:ext cx="5349240" cy="2057400"/>
+            <a:off x="640080" y="2286000"/>
+            <a:ext cx="3393338" cy="3840480"/>
           </a:xfrm>
           <a:prstGeom prst="roundRect">
             <a:avLst/>
@@ -6783,7 +7061,7 @@
           <a:solidFill>
             <a:srgbClr val="FFFFFF"/>
           </a:solidFill>
-          <a:ln w="22860">
+          <a:ln w="20320">
             <a:solidFill>
               <a:srgbClr val="B23A2A"/>
             </a:solidFill>
@@ -6814,14 +7092,14 @@
       </p:sp>
       <p:sp>
         <p:nvSpPr>
-          <p:cNvPr id="6" name="Oval 5"/>
+          <p:cNvPr id="7" name="Oval 6"/>
           <p:cNvSpPr/>
           <p:nvPr/>
         </p:nvSpPr>
         <p:spPr>
           <a:xfrm>
-            <a:off x="804672" y="1581912"/>
-            <a:ext cx="457200" cy="457200"/>
+            <a:off x="868680" y="2514600"/>
+            <a:ext cx="548640" cy="548640"/>
           </a:xfrm>
           <a:prstGeom prst="ellipse">
             <a:avLst/>
@@ -6858,14 +7136,14 @@
       </p:sp>
       <p:sp>
         <p:nvSpPr>
-          <p:cNvPr id="7" name="TextBox 6"/>
+          <p:cNvPr id="8" name="TextBox 7"/>
           <p:cNvSpPr txBox="1"/>
           <p:nvPr/>
         </p:nvSpPr>
         <p:spPr>
           <a:xfrm>
-            <a:off x="804672" y="1636776"/>
-            <a:ext cx="457200" cy="384048"/>
+            <a:off x="868680" y="2587752"/>
+            <a:ext cx="548640" cy="411480"/>
           </a:xfrm>
           <a:prstGeom prst="rect">
             <a:avLst/>
@@ -6880,7 +7158,7 @@
           <a:p>
             <a:pPr algn="ctr"/>
             <a:r>
-              <a:rPr sz="1600" b="1">
+              <a:rPr sz="2000" b="1">
                 <a:solidFill>
                   <a:srgbClr val="FFFFFF"/>
                 </a:solidFill>
@@ -6888,21 +7166,21 @@
                 <a:ea typeface="微软雅黑"/>
                 <a:cs typeface="微软雅黑"/>
               </a:rPr>
-              <a:t>!</a:t>
-            </a:r>
-          </a:p>
-        </p:txBody>
-      </p:sp>
-      <p:sp>
-        <p:nvSpPr>
-          <p:cNvPr id="8" name="TextBox 7"/>
+              <a:t>1</a:t>
+            </a:r>
+          </a:p>
+        </p:txBody>
+      </p:sp>
+      <p:sp>
+        <p:nvSpPr>
+          <p:cNvPr id="9" name="TextBox 8"/>
           <p:cNvSpPr txBox="1"/>
           <p:nvPr/>
         </p:nvSpPr>
         <p:spPr>
           <a:xfrm>
-            <a:off x="1371600" y="1527048"/>
-            <a:ext cx="4434840" cy="457200"/>
+            <a:off x="1554480" y="2560320"/>
+            <a:ext cx="2296058" cy="640080"/>
           </a:xfrm>
           <a:prstGeom prst="rect">
             <a:avLst/>
@@ -6917,33 +7195,33 @@
           <a:p>
             <a:pPr algn="l">
               <a:lnSpc>
-                <a:spcPct val="110000"/>
+                <a:spcPct val="130000"/>
               </a:lnSpc>
             </a:pPr>
             <a:r>
-              <a:rPr sz="1600" b="1">
+              <a:rPr sz="1500" b="1">
                 <a:solidFill>
                   <a:srgbClr val="1C2A33"/>
                 </a:solidFill>
-                <a:latin typeface="微软雅黑"/>
-                <a:ea typeface="微软雅黑"/>
-                <a:cs typeface="微软雅黑"/>
+                <a:latin typeface="楷体"/>
+                <a:ea typeface="楷体"/>
+                <a:cs typeface="楷体"/>
               </a:rPr>
-              <a:t/>
-            </a:r>
-          </a:p>
-        </p:txBody>
-      </p:sp>
-      <p:sp>
-        <p:nvSpPr>
-          <p:cNvPr id="9" name="TextBox 8"/>
+              <a:t>① 吸水vs脱水</a:t>
+            </a:r>
+          </a:p>
+        </p:txBody>
+      </p:sp>
+      <p:sp>
+        <p:nvSpPr>
+          <p:cNvPr id="10" name="TextBox 9"/>
           <p:cNvSpPr txBox="1"/>
           <p:nvPr/>
         </p:nvSpPr>
         <p:spPr>
           <a:xfrm>
-            <a:off x="1371600" y="1965960"/>
-            <a:ext cx="4434840" cy="1417320"/>
+            <a:off x="914400" y="3337560"/>
+            <a:ext cx="2844698" cy="2560320"/>
           </a:xfrm>
           <a:prstGeom prst="rect">
             <a:avLst/>
@@ -6958,11 +7236,11 @@
           <a:p>
             <a:pPr algn="l">
               <a:lnSpc>
-                <a:spcPct val="128000"/>
+                <a:spcPct val="150000"/>
               </a:lnSpc>
             </a:pPr>
             <a:r>
-              <a:rPr sz="1400" b="0">
+              <a:rPr sz="1300" b="0">
                 <a:solidFill>
                   <a:srgbClr val="1C2A33"/>
                 </a:solidFill>
@@ -6977,14 +7255,14 @@
       </p:sp>
       <p:sp>
         <p:nvSpPr>
-          <p:cNvPr id="10" name="Rounded Rectangle 9"/>
+          <p:cNvPr id="11" name="Rounded Rectangle 10"/>
           <p:cNvSpPr/>
           <p:nvPr/>
         </p:nvSpPr>
         <p:spPr>
           <a:xfrm>
-            <a:off x="6263640" y="1417320"/>
-            <a:ext cx="5349240" cy="2057400"/>
+            <a:off x="4399178" y="2286000"/>
+            <a:ext cx="3393338" cy="3840480"/>
           </a:xfrm>
           <a:prstGeom prst="roundRect">
             <a:avLst/>
@@ -6992,9 +7270,9 @@
           <a:solidFill>
             <a:srgbClr val="FFFFFF"/>
           </a:solidFill>
-          <a:ln w="22860">
+          <a:ln w="20320">
             <a:solidFill>
-              <a:srgbClr val="B23A2A"/>
+              <a:srgbClr val="2E7D6B"/>
             </a:solidFill>
           </a:ln>
           <a:effectLst/>
@@ -7023,20 +7301,20 @@
       </p:sp>
       <p:sp>
         <p:nvSpPr>
-          <p:cNvPr id="11" name="Oval 10"/>
+          <p:cNvPr id="12" name="Oval 11"/>
           <p:cNvSpPr/>
           <p:nvPr/>
         </p:nvSpPr>
         <p:spPr>
           <a:xfrm>
-            <a:off x="6428232" y="1581912"/>
-            <a:ext cx="457200" cy="457200"/>
+            <a:off x="4627778" y="2514600"/>
+            <a:ext cx="548640" cy="548640"/>
           </a:xfrm>
           <a:prstGeom prst="ellipse">
             <a:avLst/>
           </a:prstGeom>
           <a:solidFill>
-            <a:srgbClr val="B23A2A"/>
+            <a:srgbClr val="2E7D6B"/>
           </a:solidFill>
           <a:ln>
             <a:noFill/>
@@ -7067,14 +7345,14 @@
       </p:sp>
       <p:sp>
         <p:nvSpPr>
-          <p:cNvPr id="12" name="TextBox 11"/>
+          <p:cNvPr id="13" name="TextBox 12"/>
           <p:cNvSpPr txBox="1"/>
           <p:nvPr/>
         </p:nvSpPr>
         <p:spPr>
           <a:xfrm>
-            <a:off x="6428232" y="1636776"/>
-            <a:ext cx="457200" cy="384048"/>
+            <a:off x="4627778" y="2587752"/>
+            <a:ext cx="548640" cy="411480"/>
           </a:xfrm>
           <a:prstGeom prst="rect">
             <a:avLst/>
@@ -7089,7 +7367,7 @@
           <a:p>
             <a:pPr algn="ctr"/>
             <a:r>
-              <a:rPr sz="1600" b="1">
+              <a:rPr sz="2000" b="1">
                 <a:solidFill>
                   <a:srgbClr val="FFFFFF"/>
                 </a:solidFill>
@@ -7097,21 +7375,21 @@
                 <a:ea typeface="微软雅黑"/>
                 <a:cs typeface="微软雅黑"/>
               </a:rPr>
-              <a:t>!</a:t>
-            </a:r>
-          </a:p>
-        </p:txBody>
-      </p:sp>
-      <p:sp>
-        <p:nvSpPr>
-          <p:cNvPr id="13" name="TextBox 12"/>
+              <a:t>2</a:t>
+            </a:r>
+          </a:p>
+        </p:txBody>
+      </p:sp>
+      <p:sp>
+        <p:nvSpPr>
+          <p:cNvPr id="14" name="TextBox 13"/>
           <p:cNvSpPr txBox="1"/>
           <p:nvPr/>
         </p:nvSpPr>
         <p:spPr>
           <a:xfrm>
-            <a:off x="6995160" y="1527048"/>
-            <a:ext cx="4434840" cy="457200"/>
+            <a:off x="5313578" y="2560320"/>
+            <a:ext cx="2296058" cy="640080"/>
           </a:xfrm>
           <a:prstGeom prst="rect">
             <a:avLst/>
@@ -7126,33 +7404,33 @@
           <a:p>
             <a:pPr algn="l">
               <a:lnSpc>
-                <a:spcPct val="110000"/>
+                <a:spcPct val="130000"/>
               </a:lnSpc>
             </a:pPr>
             <a:r>
-              <a:rPr sz="1600" b="1">
+              <a:rPr sz="1500" b="1">
                 <a:solidFill>
                   <a:srgbClr val="1C2A33"/>
                 </a:solidFill>
-                <a:latin typeface="微软雅黑"/>
-                <a:ea typeface="微软雅黑"/>
-                <a:cs typeface="微软雅黑"/>
+                <a:latin typeface="楷体"/>
+                <a:ea typeface="楷体"/>
+                <a:cs typeface="楷体"/>
               </a:rPr>
-              <a:t/>
-            </a:r>
-          </a:p>
-        </p:txBody>
-      </p:sp>
-      <p:sp>
-        <p:nvSpPr>
-          <p:cNvPr id="14" name="TextBox 13"/>
+              <a:t>② 强氧化性</a:t>
+            </a:r>
+          </a:p>
+        </p:txBody>
+      </p:sp>
+      <p:sp>
+        <p:nvSpPr>
+          <p:cNvPr id="15" name="TextBox 14"/>
           <p:cNvSpPr txBox="1"/>
           <p:nvPr/>
         </p:nvSpPr>
         <p:spPr>
           <a:xfrm>
-            <a:off x="6995160" y="1965960"/>
-            <a:ext cx="4434840" cy="1417320"/>
+            <a:off x="4673498" y="3337560"/>
+            <a:ext cx="2844698" cy="2560320"/>
           </a:xfrm>
           <a:prstGeom prst="rect">
             <a:avLst/>
@@ -7167,11 +7445,11 @@
           <a:p>
             <a:pPr algn="l">
               <a:lnSpc>
-                <a:spcPct val="128000"/>
+                <a:spcPct val="150000"/>
               </a:lnSpc>
             </a:pPr>
             <a:r>
-              <a:rPr sz="1400" b="0">
+              <a:rPr sz="1300" b="0">
                 <a:solidFill>
                   <a:srgbClr val="1C2A33"/>
                 </a:solidFill>
@@ -7186,14 +7464,14 @@
       </p:sp>
       <p:sp>
         <p:nvSpPr>
-          <p:cNvPr id="15" name="Rounded Rectangle 14"/>
+          <p:cNvPr id="16" name="Rounded Rectangle 15"/>
           <p:cNvSpPr/>
           <p:nvPr/>
         </p:nvSpPr>
         <p:spPr>
           <a:xfrm>
-            <a:off x="640080" y="3703320"/>
-            <a:ext cx="5349240" cy="2057400"/>
+            <a:off x="8158276" y="2286000"/>
+            <a:ext cx="3393338" cy="3840480"/>
           </a:xfrm>
           <a:prstGeom prst="roundRect">
             <a:avLst/>
@@ -7201,9 +7479,9 @@
           <a:solidFill>
             <a:srgbClr val="FFFFFF"/>
           </a:solidFill>
-          <a:ln w="22860">
+          <a:ln w="20320">
             <a:solidFill>
-              <a:srgbClr val="B23A2A"/>
+              <a:srgbClr val="C8A86B"/>
             </a:solidFill>
           </a:ln>
           <a:effectLst/>
@@ -7232,20 +7510,20 @@
       </p:sp>
       <p:sp>
         <p:nvSpPr>
-          <p:cNvPr id="16" name="Oval 15"/>
+          <p:cNvPr id="17" name="Oval 16"/>
           <p:cNvSpPr/>
           <p:nvPr/>
         </p:nvSpPr>
         <p:spPr>
           <a:xfrm>
-            <a:off x="804672" y="3867912"/>
-            <a:ext cx="457200" cy="457200"/>
+            <a:off x="8386876" y="2514600"/>
+            <a:ext cx="548640" cy="548640"/>
           </a:xfrm>
           <a:prstGeom prst="ellipse">
             <a:avLst/>
           </a:prstGeom>
           <a:solidFill>
-            <a:srgbClr val="B23A2A"/>
+            <a:srgbClr val="C8A86B"/>
           </a:solidFill>
           <a:ln>
             <a:noFill/>
@@ -7276,14 +7554,14 @@
       </p:sp>
       <p:sp>
         <p:nvSpPr>
-          <p:cNvPr id="17" name="TextBox 16"/>
+          <p:cNvPr id="18" name="TextBox 17"/>
           <p:cNvSpPr txBox="1"/>
           <p:nvPr/>
         </p:nvSpPr>
         <p:spPr>
           <a:xfrm>
-            <a:off x="804672" y="3922776"/>
-            <a:ext cx="457200" cy="384048"/>
+            <a:off x="8386876" y="2587752"/>
+            <a:ext cx="548640" cy="411480"/>
           </a:xfrm>
           <a:prstGeom prst="rect">
             <a:avLst/>
@@ -7298,7 +7576,7 @@
           <a:p>
             <a:pPr algn="ctr"/>
             <a:r>
-              <a:rPr sz="1600" b="1">
+              <a:rPr sz="2000" b="1">
                 <a:solidFill>
                   <a:srgbClr val="FFFFFF"/>
                 </a:solidFill>
@@ -7306,21 +7584,21 @@
                 <a:ea typeface="微软雅黑"/>
                 <a:cs typeface="微软雅黑"/>
               </a:rPr>
-              <a:t>!</a:t>
-            </a:r>
-          </a:p>
-        </p:txBody>
-      </p:sp>
-      <p:sp>
-        <p:nvSpPr>
-          <p:cNvPr id="18" name="TextBox 17"/>
+              <a:t>3</a:t>
+            </a:r>
+          </a:p>
+        </p:txBody>
+      </p:sp>
+      <p:sp>
+        <p:nvSpPr>
+          <p:cNvPr id="19" name="TextBox 18"/>
           <p:cNvSpPr txBox="1"/>
           <p:nvPr/>
         </p:nvSpPr>
         <p:spPr>
           <a:xfrm>
-            <a:off x="1371600" y="3813048"/>
-            <a:ext cx="4434840" cy="457200"/>
+            <a:off x="9072676" y="2560320"/>
+            <a:ext cx="2296058" cy="640080"/>
           </a:xfrm>
           <a:prstGeom prst="rect">
             <a:avLst/>
@@ -7335,33 +7613,33 @@
           <a:p>
             <a:pPr algn="l">
               <a:lnSpc>
-                <a:spcPct val="110000"/>
+                <a:spcPct val="130000"/>
               </a:lnSpc>
             </a:pPr>
             <a:r>
-              <a:rPr sz="1600" b="1">
+              <a:rPr sz="1500" b="1">
                 <a:solidFill>
                   <a:srgbClr val="1C2A33"/>
                 </a:solidFill>
-                <a:latin typeface="微软雅黑"/>
-                <a:ea typeface="微软雅黑"/>
-                <a:cs typeface="微软雅黑"/>
+                <a:latin typeface="楷体"/>
+                <a:ea typeface="楷体"/>
+                <a:cs typeface="楷体"/>
               </a:rPr>
-              <a:t/>
-            </a:r>
-          </a:p>
-        </p:txBody>
-      </p:sp>
-      <p:sp>
-        <p:nvSpPr>
-          <p:cNvPr id="19" name="TextBox 18"/>
+              <a:t>③ 稀释顺序</a:t>
+            </a:r>
+          </a:p>
+        </p:txBody>
+      </p:sp>
+      <p:sp>
+        <p:nvSpPr>
+          <p:cNvPr id="20" name="TextBox 19"/>
           <p:cNvSpPr txBox="1"/>
           <p:nvPr/>
         </p:nvSpPr>
         <p:spPr>
           <a:xfrm>
-            <a:off x="1371600" y="4251960"/>
-            <a:ext cx="4434840" cy="1417320"/>
+            <a:off x="8432596" y="3337560"/>
+            <a:ext cx="2844698" cy="2560320"/>
           </a:xfrm>
           <a:prstGeom prst="rect">
             <a:avLst/>
@@ -7376,11 +7654,11 @@
           <a:p>
             <a:pPr algn="l">
               <a:lnSpc>
-                <a:spcPct val="128000"/>
+                <a:spcPct val="150000"/>
               </a:lnSpc>
             </a:pPr>
             <a:r>
-              <a:rPr sz="1400" b="0">
+              <a:rPr sz="1300" b="0">
                 <a:solidFill>
                   <a:srgbClr val="1C2A33"/>
                 </a:solidFill>
@@ -7395,7 +7673,7 @@
       </p:sp>
       <p:sp>
         <p:nvSpPr>
-          <p:cNvPr id="20" name="TextBox 19"/>
+          <p:cNvPr id="21" name="TextBox 20"/>
           <p:cNvSpPr txBox="1"/>
           <p:nvPr/>
         </p:nvSpPr>
@@ -7522,13 +7800,13 @@
             <a:r>
               <a:rPr sz="1300" b="1">
                 <a:solidFill>
-                  <a:srgbClr val="C8A86B"/>
+                  <a:srgbClr val="B23A2A"/>
                 </a:solidFill>
                 <a:latin typeface="微软雅黑"/>
                 <a:ea typeface="微软雅黑"/>
                 <a:cs typeface="微软雅黑"/>
               </a:rPr>
-              <a:t>要点板书</a:t>
+              <a:t>板书精华</a:t>
             </a:r>
           </a:p>
         </p:txBody>
@@ -7543,6 +7821,128 @@
           <a:xfrm>
             <a:off x="640080" y="1097280"/>
             <a:ext cx="822960" cy="30480"/>
+          </a:xfrm>
+          <a:prstGeom prst="rect">
+            <a:avLst/>
+          </a:prstGeom>
+          <a:solidFill>
+            <a:srgbClr val="B23A2A"/>
+          </a:solidFill>
+          <a:ln>
+            <a:noFill/>
+          </a:ln>
+          <a:effectLst/>
+        </p:spPr>
+        <p:style>
+          <a:lnRef idx="1">
+            <a:schemeClr val="accent1"/>
+          </a:lnRef>
+          <a:fillRef idx="3">
+            <a:schemeClr val="accent1"/>
+          </a:fillRef>
+          <a:effectRef idx="2">
+            <a:schemeClr val="accent1"/>
+          </a:effectRef>
+          <a:fontRef idx="minor">
+            <a:schemeClr val="lt1"/>
+          </a:fontRef>
+        </p:style>
+        <p:txBody>
+          <a:bodyPr rtlCol="0" anchor="ctr"/>
+          <a:lstStyle/>
+          <a:p>
+            <a:pPr algn="ctr"/>
+          </a:p>
+        </p:txBody>
+      </p:sp>
+      <p:sp>
+        <p:nvSpPr>
+          <p:cNvPr id="5" name="TextBox 4"/>
+          <p:cNvSpPr txBox="1"/>
+          <p:nvPr/>
+        </p:nvSpPr>
+        <p:spPr>
+          <a:xfrm>
+            <a:off x="640080" y="1325880"/>
+            <a:ext cx="10911535" cy="640080"/>
+          </a:xfrm>
+          <a:prstGeom prst="rect">
+            <a:avLst/>
+          </a:prstGeom>
+          <a:noFill/>
+        </p:spPr>
+        <p:txBody>
+          <a:bodyPr wrap="square" anchor="t" lIns="0" rIns="0" tIns="0" bIns="0">
+            <a:spAutoFit/>
+          </a:bodyPr>
+          <a:lstStyle/>
+          <a:p>
+            <a:pPr algn="l"/>
+            <a:r>
+              <a:rPr sz="3000" b="1">
+                <a:solidFill>
+                  <a:srgbClr val="1C2A33"/>
+                </a:solidFill>
+                <a:latin typeface="楷体"/>
+                <a:ea typeface="楷体"/>
+                <a:cs typeface="楷体"/>
+              </a:rPr>
+              <a:t>一页看懂知识骨架</a:t>
+            </a:r>
+          </a:p>
+        </p:txBody>
+      </p:sp>
+      <p:sp>
+        <p:nvSpPr>
+          <p:cNvPr id="6" name="Rounded Rectangle 5"/>
+          <p:cNvSpPr/>
+          <p:nvPr/>
+        </p:nvSpPr>
+        <p:spPr>
+          <a:xfrm>
+            <a:off x="640080" y="2103120"/>
+            <a:ext cx="10911535" cy="4114800"/>
+          </a:xfrm>
+          <a:prstGeom prst="roundRect">
+            <a:avLst/>
+          </a:prstGeom>
+          <a:solidFill>
+            <a:srgbClr val="1C2A33"/>
+          </a:solidFill>
+          <a:effectLst/>
+        </p:spPr>
+        <p:style>
+          <a:lnRef idx="1">
+            <a:schemeClr val="accent1"/>
+          </a:lnRef>
+          <a:fillRef idx="3">
+            <a:schemeClr val="accent1"/>
+          </a:fillRef>
+          <a:effectRef idx="2">
+            <a:schemeClr val="accent1"/>
+          </a:effectRef>
+          <a:fontRef idx="minor">
+            <a:schemeClr val="lt1"/>
+          </a:fontRef>
+        </p:style>
+        <p:txBody>
+          <a:bodyPr rtlCol="0" anchor="ctr"/>
+          <a:lstStyle/>
+          <a:p>
+            <a:pPr algn="ctr"/>
+          </a:p>
+        </p:txBody>
+      </p:sp>
+      <p:sp>
+        <p:nvSpPr>
+          <p:cNvPr id="7" name="Rectangle 6"/>
+          <p:cNvSpPr/>
+          <p:nvPr/>
+        </p:nvSpPr>
+        <p:spPr>
+          <a:xfrm>
+            <a:off x="1005840" y="2423160"/>
+            <a:ext cx="54864" cy="381000"/>
           </a:xfrm>
           <a:prstGeom prst="rect">
             <a:avLst/>
@@ -7579,60 +7979,14 @@
       </p:sp>
       <p:sp>
         <p:nvSpPr>
-          <p:cNvPr id="5" name="Rounded Rectangle 4"/>
-          <p:cNvSpPr/>
-          <p:nvPr/>
-        </p:nvSpPr>
-        <p:spPr>
-          <a:xfrm>
-            <a:off x="640080" y="1417320"/>
-            <a:ext cx="10911535" cy="5394960"/>
-          </a:xfrm>
-          <a:prstGeom prst="roundRect">
-            <a:avLst/>
-          </a:prstGeom>
-          <a:solidFill>
-            <a:srgbClr val="FFFFFF"/>
-          </a:solidFill>
-          <a:ln w="25400">
-            <a:solidFill>
-              <a:srgbClr val="C8A86B"/>
-            </a:solidFill>
-          </a:ln>
-          <a:effectLst/>
-        </p:spPr>
-        <p:style>
-          <a:lnRef idx="1">
-            <a:schemeClr val="accent1"/>
-          </a:lnRef>
-          <a:fillRef idx="3">
-            <a:schemeClr val="accent1"/>
-          </a:fillRef>
-          <a:effectRef idx="2">
-            <a:schemeClr val="accent1"/>
-          </a:effectRef>
-          <a:fontRef idx="minor">
-            <a:schemeClr val="lt1"/>
-          </a:fontRef>
-        </p:style>
-        <p:txBody>
-          <a:bodyPr rtlCol="0" anchor="ctr"/>
-          <a:lstStyle/>
-          <a:p>
-            <a:pPr algn="ctr"/>
-          </a:p>
-        </p:txBody>
-      </p:sp>
-      <p:sp>
-        <p:nvSpPr>
-          <p:cNvPr id="6" name="TextBox 5"/>
+          <p:cNvPr id="8" name="TextBox 7"/>
           <p:cNvSpPr txBox="1"/>
           <p:nvPr/>
         </p:nvSpPr>
         <p:spPr>
           <a:xfrm>
-            <a:off x="914400" y="1554480"/>
-            <a:ext cx="10362895" cy="5120640"/>
+            <a:off x="1280160" y="2377440"/>
+            <a:ext cx="9905695" cy="3566160"/>
           </a:xfrm>
           <a:prstGeom prst="rect">
             <a:avLst/>
@@ -7647,37 +8001,36 @@
           <a:p>
             <a:pPr algn="l">
               <a:lnSpc>
-                <a:spcPct val="110000"/>
+                <a:spcPct val="150000"/>
               </a:lnSpc>
               <a:spcAft>
-                <a:spcPts val="100"/>
+                <a:spcPts val="200"/>
               </a:spcAft>
             </a:pPr>
             <a:r>
-              <a:rPr sz="1300" b="0">
-                <a:solidFill>
-                  <a:srgbClr val="1C2A33"/>
-                </a:solidFill>
-                <a:latin typeface="微软雅黑"/>
-                <a:ea typeface="微软雅黑"/>
-                <a:cs typeface="微软雅黑"/>
+              <a:rPr sz="1500" b="0">
+                <a:solidFill>
+                  <a:srgbClr val="FFFFFF"/>
+                </a:solidFill>
+                <a:latin typeface="楷体"/>
+                <a:ea typeface="楷体"/>
+                <a:cs typeface="楷体"/>
               </a:rPr>
-              <a:t>┌── 硫酸 ──┐
-│ 稀:酸通性 │
-│ 浓:吸水性(物)│
-│ 脱水性(化,炭化)│
-│ Cu+2H2SO4(浓)=│
-│ CuSO4+SO2↑+ │
-│ 2H2O │
-│ 稀释:酸入水 │
-└────────────────┘</a:t>
-            </a:r>
-          </a:p>
-        </p:txBody>
-      </p:sp>
-      <p:sp>
-        <p:nvSpPr>
-          <p:cNvPr id="7" name="TextBox 6"/>
+              <a:t>硫酸
+稀:酸通性
+浓:吸水性(物)
+脱水性(化,炭化)
+Cu+2H2SO4(浓)=
+CuSO4+SO2↑+
+2H2O
+稀释:酸入水</a:t>
+            </a:r>
+          </a:p>
+        </p:txBody>
+      </p:sp>
+      <p:sp>
+        <p:nvSpPr>
+          <p:cNvPr id="9" name="TextBox 8"/>
           <p:cNvSpPr txBox="1"/>
           <p:nvPr/>
         </p:nvSpPr>
@@ -7804,13 +8157,13 @@
             <a:r>
               <a:rPr sz="1300" b="1">
                 <a:solidFill>
-                  <a:srgbClr val="2E7D6B"/>
+                  <a:srgbClr val="B23A2A"/>
                 </a:solidFill>
                 <a:latin typeface="微软雅黑"/>
                 <a:ea typeface="微软雅黑"/>
                 <a:cs typeface="微软雅黑"/>
               </a:rPr>
-              <a:t>分层作业</a:t>
+              <a:t>作业</a:t>
             </a:r>
           </a:p>
         </p:txBody>
@@ -7825,6 +8178,301 @@
           <a:xfrm>
             <a:off x="640080" y="1097280"/>
             <a:ext cx="822960" cy="30480"/>
+          </a:xfrm>
+          <a:prstGeom prst="rect">
+            <a:avLst/>
+          </a:prstGeom>
+          <a:solidFill>
+            <a:srgbClr val="B23A2A"/>
+          </a:solidFill>
+          <a:ln>
+            <a:noFill/>
+          </a:ln>
+          <a:effectLst/>
+        </p:spPr>
+        <p:style>
+          <a:lnRef idx="1">
+            <a:schemeClr val="accent1"/>
+          </a:lnRef>
+          <a:fillRef idx="3">
+            <a:schemeClr val="accent1"/>
+          </a:fillRef>
+          <a:effectRef idx="2">
+            <a:schemeClr val="accent1"/>
+          </a:effectRef>
+          <a:fontRef idx="minor">
+            <a:schemeClr val="lt1"/>
+          </a:fontRef>
+        </p:style>
+        <p:txBody>
+          <a:bodyPr rtlCol="0" anchor="ctr"/>
+          <a:lstStyle/>
+          <a:p>
+            <a:pPr algn="ctr"/>
+          </a:p>
+        </p:txBody>
+      </p:sp>
+      <p:sp>
+        <p:nvSpPr>
+          <p:cNvPr id="5" name="TextBox 4"/>
+          <p:cNvSpPr txBox="1"/>
+          <p:nvPr/>
+        </p:nvSpPr>
+        <p:spPr>
+          <a:xfrm>
+            <a:off x="640080" y="1325880"/>
+            <a:ext cx="10911535" cy="640080"/>
+          </a:xfrm>
+          <a:prstGeom prst="rect">
+            <a:avLst/>
+          </a:prstGeom>
+          <a:noFill/>
+        </p:spPr>
+        <p:txBody>
+          <a:bodyPr wrap="square" anchor="t" lIns="0" rIns="0" tIns="0" bIns="0">
+            <a:spAutoFit/>
+          </a:bodyPr>
+          <a:lstStyle/>
+          <a:p>
+            <a:pPr algn="l"/>
+            <a:r>
+              <a:rPr sz="3000" b="1">
+                <a:solidFill>
+                  <a:srgbClr val="1C2A33"/>
+                </a:solidFill>
+                <a:latin typeface="楷体"/>
+                <a:ea typeface="楷体"/>
+                <a:cs typeface="楷体"/>
+              </a:rPr>
+              <a:t>分层巩固练习</a:t>
+            </a:r>
+          </a:p>
+        </p:txBody>
+      </p:sp>
+      <p:sp>
+        <p:nvSpPr>
+          <p:cNvPr id="6" name="Rounded Rectangle 5"/>
+          <p:cNvSpPr/>
+          <p:nvPr/>
+        </p:nvSpPr>
+        <p:spPr>
+          <a:xfrm>
+            <a:off x="640080" y="2057400"/>
+            <a:ext cx="10911535" cy="1344168"/>
+          </a:xfrm>
+          <a:prstGeom prst="roundRect">
+            <a:avLst/>
+          </a:prstGeom>
+          <a:solidFill>
+            <a:srgbClr val="FFFFFF"/>
+          </a:solidFill>
+          <a:ln w="20320">
+            <a:solidFill>
+              <a:srgbClr val="B23A2A"/>
+            </a:solidFill>
+          </a:ln>
+          <a:effectLst/>
+        </p:spPr>
+        <p:style>
+          <a:lnRef idx="1">
+            <a:schemeClr val="accent1"/>
+          </a:lnRef>
+          <a:fillRef idx="3">
+            <a:schemeClr val="accent1"/>
+          </a:fillRef>
+          <a:effectRef idx="2">
+            <a:schemeClr val="accent1"/>
+          </a:effectRef>
+          <a:fontRef idx="minor">
+            <a:schemeClr val="lt1"/>
+          </a:fontRef>
+        </p:style>
+        <p:txBody>
+          <a:bodyPr rtlCol="0" anchor="ctr"/>
+          <a:lstStyle/>
+          <a:p>
+            <a:pPr algn="ctr"/>
+          </a:p>
+        </p:txBody>
+      </p:sp>
+      <p:sp>
+        <p:nvSpPr>
+          <p:cNvPr id="7" name="Rectangle 6"/>
+          <p:cNvSpPr/>
+          <p:nvPr/>
+        </p:nvSpPr>
+        <p:spPr>
+          <a:xfrm>
+            <a:off x="640080" y="2057400"/>
+            <a:ext cx="109728" cy="1344168"/>
+          </a:xfrm>
+          <a:prstGeom prst="rect">
+            <a:avLst/>
+          </a:prstGeom>
+          <a:solidFill>
+            <a:srgbClr val="B23A2A"/>
+          </a:solidFill>
+          <a:ln>
+            <a:noFill/>
+          </a:ln>
+          <a:effectLst/>
+        </p:spPr>
+        <p:style>
+          <a:lnRef idx="1">
+            <a:schemeClr val="accent1"/>
+          </a:lnRef>
+          <a:fillRef idx="3">
+            <a:schemeClr val="accent1"/>
+          </a:fillRef>
+          <a:effectRef idx="2">
+            <a:schemeClr val="accent1"/>
+          </a:effectRef>
+          <a:fontRef idx="minor">
+            <a:schemeClr val="lt1"/>
+          </a:fontRef>
+        </p:style>
+        <p:txBody>
+          <a:bodyPr rtlCol="0" anchor="ctr"/>
+          <a:lstStyle/>
+          <a:p>
+            <a:pPr algn="ctr"/>
+          </a:p>
+        </p:txBody>
+      </p:sp>
+      <p:sp>
+        <p:nvSpPr>
+          <p:cNvPr id="8" name="TextBox 7"/>
+          <p:cNvSpPr txBox="1"/>
+          <p:nvPr/>
+        </p:nvSpPr>
+        <p:spPr>
+          <a:xfrm>
+            <a:off x="914400" y="2148840"/>
+            <a:ext cx="10362895" cy="365760"/>
+          </a:xfrm>
+          <a:prstGeom prst="rect">
+            <a:avLst/>
+          </a:prstGeom>
+          <a:noFill/>
+        </p:spPr>
+        <p:txBody>
+          <a:bodyPr wrap="square" anchor="t" lIns="0" rIns="0" tIns="0" bIns="0">
+            <a:spAutoFit/>
+          </a:bodyPr>
+          <a:lstStyle/>
+          <a:p>
+            <a:pPr algn="l"/>
+            <a:r>
+              <a:rPr sz="1500" b="1">
+                <a:solidFill>
+                  <a:srgbClr val="B23A2A"/>
+                </a:solidFill>
+                <a:latin typeface="微软雅黑"/>
+                <a:ea typeface="微软雅黑"/>
+                <a:cs typeface="微软雅黑"/>
+              </a:rPr>
+              <a:t>基础 · 必做</a:t>
+            </a:r>
+          </a:p>
+        </p:txBody>
+      </p:sp>
+      <p:sp>
+        <p:nvSpPr>
+          <p:cNvPr id="9" name="TextBox 8"/>
+          <p:cNvSpPr txBox="1"/>
+          <p:nvPr/>
+        </p:nvSpPr>
+        <p:spPr>
+          <a:xfrm>
+            <a:off x="914400" y="2514600"/>
+            <a:ext cx="10362895" cy="832104"/>
+          </a:xfrm>
+          <a:prstGeom prst="rect">
+            <a:avLst/>
+          </a:prstGeom>
+          <a:noFill/>
+        </p:spPr>
+        <p:txBody>
+          <a:bodyPr wrap="square" anchor="t" lIns="0" rIns="0" tIns="0" bIns="0">
+            <a:spAutoFit/>
+          </a:bodyPr>
+          <a:lstStyle/>
+          <a:p>
+            <a:pPr algn="l">
+              <a:lnSpc>
+                <a:spcPct val="145000"/>
+              </a:lnSpc>
+            </a:pPr>
+            <a:r>
+              <a:rPr sz="1250" b="0">
+                <a:solidFill>
+                  <a:srgbClr val="1C2A33"/>
+                </a:solidFill>
+                <a:latin typeface="楷体"/>
+                <a:ea typeface="楷体"/>
+                <a:cs typeface="楷体"/>
+              </a:rPr>
+              <a:t>1. 浓硫酸的吸水性和脱水性有什么本质区别？2. 写出Cu与浓硫酸加热反应的化学方程式，指出硫元素化合价变化。</a:t>
+            </a:r>
+          </a:p>
+        </p:txBody>
+      </p:sp>
+      <p:sp>
+        <p:nvSpPr>
+          <p:cNvPr id="10" name="Rounded Rectangle 9"/>
+          <p:cNvSpPr/>
+          <p:nvPr/>
+        </p:nvSpPr>
+        <p:spPr>
+          <a:xfrm>
+            <a:off x="640080" y="3602736"/>
+            <a:ext cx="10911535" cy="1344168"/>
+          </a:xfrm>
+          <a:prstGeom prst="roundRect">
+            <a:avLst/>
+          </a:prstGeom>
+          <a:solidFill>
+            <a:srgbClr val="FFFFFF"/>
+          </a:solidFill>
+          <a:ln w="20320">
+            <a:solidFill>
+              <a:srgbClr val="2E7D6B"/>
+            </a:solidFill>
+          </a:ln>
+          <a:effectLst/>
+        </p:spPr>
+        <p:style>
+          <a:lnRef idx="1">
+            <a:schemeClr val="accent1"/>
+          </a:lnRef>
+          <a:fillRef idx="3">
+            <a:schemeClr val="accent1"/>
+          </a:fillRef>
+          <a:effectRef idx="2">
+            <a:schemeClr val="accent1"/>
+          </a:effectRef>
+          <a:fontRef idx="minor">
+            <a:schemeClr val="lt1"/>
+          </a:fontRef>
+        </p:style>
+        <p:txBody>
+          <a:bodyPr rtlCol="0" anchor="ctr"/>
+          <a:lstStyle/>
+          <a:p>
+            <a:pPr algn="ctr"/>
+          </a:p>
+        </p:txBody>
+      </p:sp>
+      <p:sp>
+        <p:nvSpPr>
+          <p:cNvPr id="11" name="Rectangle 10"/>
+          <p:cNvSpPr/>
+          <p:nvPr/>
+        </p:nvSpPr>
+        <p:spPr>
+          <a:xfrm>
+            <a:off x="640080" y="3602736"/>
+            <a:ext cx="109728" cy="1344168"/>
           </a:xfrm>
           <a:prstGeom prst="rect">
             <a:avLst/>
@@ -7861,14 +8509,93 @@
       </p:sp>
       <p:sp>
         <p:nvSpPr>
-          <p:cNvPr id="5" name="Rounded Rectangle 4"/>
+          <p:cNvPr id="12" name="TextBox 11"/>
+          <p:cNvSpPr txBox="1"/>
+          <p:nvPr/>
+        </p:nvSpPr>
+        <p:spPr>
+          <a:xfrm>
+            <a:off x="914400" y="3694176"/>
+            <a:ext cx="10362895" cy="365760"/>
+          </a:xfrm>
+          <a:prstGeom prst="rect">
+            <a:avLst/>
+          </a:prstGeom>
+          <a:noFill/>
+        </p:spPr>
+        <p:txBody>
+          <a:bodyPr wrap="square" anchor="t" lIns="0" rIns="0" tIns="0" bIns="0">
+            <a:spAutoFit/>
+          </a:bodyPr>
+          <a:lstStyle/>
+          <a:p>
+            <a:pPr algn="l"/>
+            <a:r>
+              <a:rPr sz="1500" b="1">
+                <a:solidFill>
+                  <a:srgbClr val="2E7D6B"/>
+                </a:solidFill>
+                <a:latin typeface="微软雅黑"/>
+                <a:ea typeface="微软雅黑"/>
+                <a:cs typeface="微软雅黑"/>
+              </a:rPr>
+              <a:t>提高 · 选做</a:t>
+            </a:r>
+          </a:p>
+        </p:txBody>
+      </p:sp>
+      <p:sp>
+        <p:nvSpPr>
+          <p:cNvPr id="13" name="TextBox 12"/>
+          <p:cNvSpPr txBox="1"/>
+          <p:nvPr/>
+        </p:nvSpPr>
+        <p:spPr>
+          <a:xfrm>
+            <a:off x="914400" y="4059936"/>
+            <a:ext cx="10362895" cy="832104"/>
+          </a:xfrm>
+          <a:prstGeom prst="rect">
+            <a:avLst/>
+          </a:prstGeom>
+          <a:noFill/>
+        </p:spPr>
+        <p:txBody>
+          <a:bodyPr wrap="square" anchor="t" lIns="0" rIns="0" tIns="0" bIns="0">
+            <a:spAutoFit/>
+          </a:bodyPr>
+          <a:lstStyle/>
+          <a:p>
+            <a:pPr algn="l">
+              <a:lnSpc>
+                <a:spcPct val="145000"/>
+              </a:lnSpc>
+            </a:pPr>
+            <a:r>
+              <a:rPr sz="1250" b="0">
+                <a:solidFill>
+                  <a:srgbClr val="1C2A33"/>
+                </a:solidFill>
+                <a:latin typeface="楷体"/>
+                <a:ea typeface="楷体"/>
+                <a:cs typeface="楷体"/>
+              </a:rPr>
+              <a:t>为什么浓硫酸可以干燥CO2、O2，却不能干燥NH3、H2S？
+参考答案基础1：吸水性吸收游离水(物理)，脱水性将有机物中H、O按2:1脱去成水(化学炭化)。基础2：Cu+2H2SO4(浓)=CuSO4+SO2↑+2H2O；S由+6降到+4。提高：NH3是碱性气体、H2S是还原性气体，会与浓硫酸反应；CO2、O2不与浓硫酸反应可干燥。</a:t>
+            </a:r>
+          </a:p>
+        </p:txBody>
+      </p:sp>
+      <p:sp>
+        <p:nvSpPr>
+          <p:cNvPr id="14" name="Rounded Rectangle 13"/>
           <p:cNvSpPr/>
           <p:nvPr/>
         </p:nvSpPr>
         <p:spPr>
           <a:xfrm>
-            <a:off x="640080" y="1417320"/>
-            <a:ext cx="10911535" cy="1417320"/>
+            <a:off x="640080" y="5148072"/>
+            <a:ext cx="10911535" cy="1344168"/>
           </a:xfrm>
           <a:prstGeom prst="roundRect">
             <a:avLst/>
@@ -7876,9 +8603,9 @@
           <a:solidFill>
             <a:srgbClr val="FFFFFF"/>
           </a:solidFill>
-          <a:ln w="22860">
+          <a:ln w="20320">
             <a:solidFill>
-              <a:srgbClr val="2E7D6B"/>
+              <a:srgbClr val="C8A86B"/>
             </a:solidFill>
           </a:ln>
           <a:effectLst/>
@@ -7907,107 +8634,23 @@
       </p:sp>
       <p:sp>
         <p:nvSpPr>
-          <p:cNvPr id="6" name="TextBox 5"/>
-          <p:cNvSpPr txBox="1"/>
-          <p:nvPr/>
-        </p:nvSpPr>
-        <p:spPr>
-          <a:xfrm>
-            <a:off x="1371600" y="1527048"/>
-            <a:ext cx="9997135" cy="457200"/>
-          </a:xfrm>
-          <a:prstGeom prst="rect">
-            <a:avLst/>
-          </a:prstGeom>
-          <a:noFill/>
-        </p:spPr>
-        <p:txBody>
-          <a:bodyPr wrap="square" anchor="t" lIns="0" rIns="0" tIns="0" bIns="0">
-            <a:spAutoFit/>
-          </a:bodyPr>
-          <a:lstStyle/>
-          <a:p>
-            <a:pPr algn="l">
-              <a:lnSpc>
-                <a:spcPct val="110000"/>
-              </a:lnSpc>
-            </a:pPr>
-            <a:r>
-              <a:rPr sz="1600" b="1">
-                <a:solidFill>
-                  <a:srgbClr val="1C2A33"/>
-                </a:solidFill>
-                <a:latin typeface="微软雅黑"/>
-                <a:ea typeface="微软雅黑"/>
-                <a:cs typeface="微软雅黑"/>
-              </a:rPr>
-              <a:t/>
-            </a:r>
-          </a:p>
-        </p:txBody>
-      </p:sp>
-      <p:sp>
-        <p:nvSpPr>
-          <p:cNvPr id="7" name="TextBox 6"/>
-          <p:cNvSpPr txBox="1"/>
-          <p:nvPr/>
-        </p:nvSpPr>
-        <p:spPr>
-          <a:xfrm>
-            <a:off x="1371600" y="1965960"/>
-            <a:ext cx="9997135" cy="777240"/>
-          </a:xfrm>
-          <a:prstGeom prst="rect">
-            <a:avLst/>
-          </a:prstGeom>
-          <a:noFill/>
-        </p:spPr>
-        <p:txBody>
-          <a:bodyPr wrap="square" anchor="t" lIns="0" rIns="0" tIns="0" bIns="0">
-            <a:spAutoFit/>
-          </a:bodyPr>
-          <a:lstStyle/>
-          <a:p>
-            <a:pPr algn="l">
-              <a:lnSpc>
-                <a:spcPct val="128000"/>
-              </a:lnSpc>
-            </a:pPr>
-            <a:r>
-              <a:rPr sz="1100" b="0">
-                <a:solidFill>
-                  <a:srgbClr val="1C2A33"/>
-                </a:solidFill>
-                <a:latin typeface="楷体"/>
-                <a:ea typeface="楷体"/>
-                <a:cs typeface="楷体"/>
-              </a:rPr>
-              <a:t>【基础作业】1. 浓硫酸的吸水性和脱水性有什么本质区别？2. 写出Cu与浓硫酸加热反应的化学方程式，指出硫元素化合价变化。</a:t>
-            </a:r>
-          </a:p>
-        </p:txBody>
-      </p:sp>
-      <p:sp>
-        <p:nvSpPr>
-          <p:cNvPr id="8" name="Rounded Rectangle 7"/>
+          <p:cNvPr id="15" name="Rectangle 14"/>
           <p:cNvSpPr/>
           <p:nvPr/>
         </p:nvSpPr>
         <p:spPr>
           <a:xfrm>
-            <a:off x="640080" y="2971800"/>
-            <a:ext cx="10911535" cy="1417320"/>
-          </a:xfrm>
-          <a:prstGeom prst="roundRect">
+            <a:off x="640080" y="5148072"/>
+            <a:ext cx="109728" cy="1344168"/>
+          </a:xfrm>
+          <a:prstGeom prst="rect">
             <a:avLst/>
           </a:prstGeom>
           <a:solidFill>
-            <a:srgbClr val="FFFFFF"/>
+            <a:srgbClr val="C8A86B"/>
           </a:solidFill>
-          <a:ln w="22860">
-            <a:solidFill>
-              <a:srgbClr val="2E7D6B"/>
-            </a:solidFill>
+          <a:ln>
+            <a:noFill/>
           </a:ln>
           <a:effectLst/>
         </p:spPr>
@@ -8035,14 +8678,14 @@
       </p:sp>
       <p:sp>
         <p:nvSpPr>
-          <p:cNvPr id="9" name="TextBox 8"/>
+          <p:cNvPr id="16" name="TextBox 15"/>
           <p:cNvSpPr txBox="1"/>
           <p:nvPr/>
         </p:nvSpPr>
         <p:spPr>
           <a:xfrm>
-            <a:off x="1371600" y="3081528"/>
-            <a:ext cx="9997135" cy="457200"/>
+            <a:off x="914400" y="5239512"/>
+            <a:ext cx="10362895" cy="365760"/>
           </a:xfrm>
           <a:prstGeom prst="rect">
             <a:avLst/>
@@ -8055,35 +8698,31 @@
           </a:bodyPr>
           <a:lstStyle/>
           <a:p>
-            <a:pPr algn="l">
-              <a:lnSpc>
-                <a:spcPct val="110000"/>
-              </a:lnSpc>
-            </a:pPr>
-            <a:r>
-              <a:rPr sz="1600" b="1">
-                <a:solidFill>
-                  <a:srgbClr val="1C2A33"/>
+            <a:pPr algn="l"/>
+            <a:r>
+              <a:rPr sz="1500" b="1">
+                <a:solidFill>
+                  <a:srgbClr val="C8A86B"/>
                 </a:solidFill>
                 <a:latin typeface="微软雅黑"/>
                 <a:ea typeface="微软雅黑"/>
                 <a:cs typeface="微软雅黑"/>
               </a:rPr>
-              <a:t/>
-            </a:r>
-          </a:p>
-        </p:txBody>
-      </p:sp>
-      <p:sp>
-        <p:nvSpPr>
-          <p:cNvPr id="10" name="TextBox 9"/>
+              <a:t>拓展 · 衔接</a:t>
+            </a:r>
+          </a:p>
+        </p:txBody>
+      </p:sp>
+      <p:sp>
+        <p:nvSpPr>
+          <p:cNvPr id="17" name="TextBox 16"/>
           <p:cNvSpPr txBox="1"/>
           <p:nvPr/>
         </p:nvSpPr>
         <p:spPr>
           <a:xfrm>
-            <a:off x="1371600" y="3520440"/>
-            <a:ext cx="9997135" cy="777240"/>
+            <a:off x="914400" y="5605272"/>
+            <a:ext cx="10362895" cy="832104"/>
           </a:xfrm>
           <a:prstGeom prst="rect">
             <a:avLst/>
@@ -8098,11 +8737,11 @@
           <a:p>
             <a:pPr algn="l">
               <a:lnSpc>
-                <a:spcPct val="128000"/>
+                <a:spcPct val="145000"/>
               </a:lnSpc>
             </a:pPr>
             <a:r>
-              <a:rPr sz="1400" b="0">
+              <a:rPr sz="1250" b="0">
                 <a:solidFill>
                   <a:srgbClr val="1C2A33"/>
                 </a:solidFill>
@@ -8110,14 +8749,14 @@
                 <a:ea typeface="楷体"/>
                 <a:cs typeface="楷体"/>
               </a:rPr>
-              <a:t>【提高作业】为什么浓硫酸可以干燥CO2、O2，却不能干燥NH3、H2S？</a:t>
-            </a:r>
-          </a:p>
-        </p:txBody>
-      </p:sp>
-      <p:sp>
-        <p:nvSpPr>
-          <p:cNvPr id="11" name="TextBox 10"/>
+              <a:t>比较浓硫酸与稀硫酸在组成、性质上的本质不同。</a:t>
+            </a:r>
+          </a:p>
+        </p:txBody>
+      </p:sp>
+      <p:sp>
+        <p:nvSpPr>
+          <p:cNvPr id="18" name="TextBox 17"/>
           <p:cNvSpPr txBox="1"/>
           <p:nvPr/>
         </p:nvSpPr>
@@ -8244,13 +8883,13 @@
             <a:r>
               <a:rPr sz="1300" b="1">
                 <a:solidFill>
-                  <a:srgbClr val="C8A86B"/>
+                  <a:srgbClr val="B23A2A"/>
                 </a:solidFill>
                 <a:latin typeface="微软雅黑"/>
                 <a:ea typeface="微软雅黑"/>
                 <a:cs typeface="微软雅黑"/>
               </a:rPr>
-              <a:t>本课小结</a:t>
+              <a:t>单元小结</a:t>
             </a:r>
           </a:p>
         </p:txBody>
@@ -8270,7 +8909,7 @@
             <a:avLst/>
           </a:prstGeom>
           <a:solidFill>
-            <a:srgbClr val="C8A86B"/>
+            <a:srgbClr val="B23A2A"/>
           </a:solidFill>
           <a:ln>
             <a:noFill/>
@@ -8301,24 +8940,144 @@
       </p:sp>
       <p:sp>
         <p:nvSpPr>
-          <p:cNvPr id="5" name="Rectangle 4"/>
+          <p:cNvPr id="5" name="TextBox 4"/>
+          <p:cNvSpPr txBox="1"/>
+          <p:nvPr/>
+        </p:nvSpPr>
+        <p:spPr>
+          <a:xfrm>
+            <a:off x="640080" y="1325880"/>
+            <a:ext cx="10911535" cy="640080"/>
+          </a:xfrm>
+          <a:prstGeom prst="rect">
+            <a:avLst/>
+          </a:prstGeom>
+          <a:noFill/>
+        </p:spPr>
+        <p:txBody>
+          <a:bodyPr wrap="square" anchor="t" lIns="0" rIns="0" tIns="0" bIns="0">
+            <a:spAutoFit/>
+          </a:bodyPr>
+          <a:lstStyle/>
+          <a:p>
+            <a:pPr algn="l"/>
+            <a:r>
+              <a:rPr sz="3000" b="1">
+                <a:solidFill>
+                  <a:srgbClr val="1C2A33"/>
+                </a:solidFill>
+                <a:latin typeface="楷体"/>
+                <a:ea typeface="楷体"/>
+                <a:cs typeface="楷体"/>
+              </a:rPr>
+              <a:t>收口与衔接</a:t>
+            </a:r>
+          </a:p>
+        </p:txBody>
+      </p:sp>
+      <p:sp>
+        <p:nvSpPr>
+          <p:cNvPr id="6" name="TextBox 5"/>
+          <p:cNvSpPr txBox="1"/>
+          <p:nvPr/>
+        </p:nvSpPr>
+        <p:spPr>
+          <a:xfrm>
+            <a:off x="640080" y="2103120"/>
+            <a:ext cx="5227167" cy="4206240"/>
+          </a:xfrm>
+          <a:prstGeom prst="rect">
+            <a:avLst/>
+          </a:prstGeom>
+          <a:noFill/>
+        </p:spPr>
+        <p:txBody>
+          <a:bodyPr wrap="square" anchor="t" lIns="0" rIns="0" tIns="0" bIns="0">
+            <a:spAutoFit/>
+          </a:bodyPr>
+          <a:lstStyle/>
+          <a:p>
+            <a:pPr algn="l">
+              <a:lnSpc>
+                <a:spcPct val="155000"/>
+              </a:lnSpc>
+              <a:spcAft>
+                <a:spcPts val="900"/>
+              </a:spcAft>
+            </a:pPr>
+            <a:r>
+              <a:rPr sz="1450" b="0">
+                <a:solidFill>
+                  <a:srgbClr val="1C2A33"/>
+                </a:solidFill>
+                <a:latin typeface="楷体"/>
+                <a:ea typeface="楷体"/>
+                <a:cs typeface="楷体"/>
+              </a:rPr>
+              <a:t>硫酸是用途最广的化工原料之一。</a:t>
+            </a:r>
+          </a:p>
+          <a:p>
+            <a:pPr algn="l">
+              <a:lnSpc>
+                <a:spcPct val="155000"/>
+              </a:lnSpc>
+              <a:spcAft>
+                <a:spcPts val="900"/>
+              </a:spcAft>
+            </a:pPr>
+            <a:r>
+              <a:rPr sz="1450" b="0">
+                <a:solidFill>
+                  <a:srgbClr val="1C2A33"/>
+                </a:solidFill>
+                <a:latin typeface="楷体"/>
+                <a:ea typeface="楷体"/>
+                <a:cs typeface="楷体"/>
+              </a:rPr>
+              <a:t>本课核心：浓硫酸的吸水性（物理、作干燥剂）、脱水性（化学、使有机物炭化）与强氧化性（与 Cu 等加热生成 SO₂）。</a:t>
+            </a:r>
+          </a:p>
+          <a:p>
+            <a:pPr algn="l">
+              <a:lnSpc>
+                <a:spcPct val="155000"/>
+              </a:lnSpc>
+              <a:spcAft>
+                <a:spcPts val="900"/>
+              </a:spcAft>
+            </a:pPr>
+            <a:r>
+              <a:rPr sz="1450" b="0">
+                <a:solidFill>
+                  <a:srgbClr val="1C2A33"/>
+                </a:solidFill>
+                <a:latin typeface="楷体"/>
+                <a:ea typeface="楷体"/>
+                <a:cs typeface="楷体"/>
+              </a:rPr>
+              <a:t>稀释须“酸入水、沿壁慢搅”，呼应前课 SO₂，并衔接后续氮、氨的氧化还原体系。</a:t>
+            </a:r>
+          </a:p>
+        </p:txBody>
+      </p:sp>
+      <p:sp>
+        <p:nvSpPr>
+          <p:cNvPr id="7" name="Rounded Rectangle 6"/>
           <p:cNvSpPr/>
           <p:nvPr/>
         </p:nvSpPr>
         <p:spPr>
           <a:xfrm>
-            <a:off x="640080" y="1737360"/>
-            <a:ext cx="54864" cy="431800"/>
-          </a:xfrm>
-          <a:prstGeom prst="rect">
+            <a:off x="6324447" y="2103120"/>
+            <a:ext cx="5227167" cy="4114800"/>
+          </a:xfrm>
+          <a:prstGeom prst="roundRect">
             <a:avLst/>
           </a:prstGeom>
           <a:solidFill>
-            <a:srgbClr val="C8A86B"/>
+            <a:srgbClr val="1C2A33"/>
           </a:solidFill>
-          <a:ln>
-            <a:noFill/>
-          </a:ln>
           <a:effectLst/>
         </p:spPr>
         <p:style>
@@ -8345,14 +9104,51 @@
       </p:sp>
       <p:sp>
         <p:nvSpPr>
-          <p:cNvPr id="6" name="TextBox 5"/>
+          <p:cNvPr id="8" name="TextBox 7"/>
           <p:cNvSpPr txBox="1"/>
           <p:nvPr/>
         </p:nvSpPr>
         <p:spPr>
           <a:xfrm>
-            <a:off x="868680" y="1645920"/>
-            <a:ext cx="10682935" cy="2194560"/>
+            <a:off x="6598767" y="2286000"/>
+            <a:ext cx="4678527" cy="457200"/>
+          </a:xfrm>
+          <a:prstGeom prst="rect">
+            <a:avLst/>
+          </a:prstGeom>
+          <a:noFill/>
+        </p:spPr>
+        <p:txBody>
+          <a:bodyPr wrap="square" anchor="t" lIns="0" rIns="0" tIns="0" bIns="0">
+            <a:spAutoFit/>
+          </a:bodyPr>
+          <a:lstStyle/>
+          <a:p>
+            <a:pPr algn="l"/>
+            <a:r>
+              <a:rPr sz="1700" b="1">
+                <a:solidFill>
+                  <a:srgbClr val="C8A86B"/>
+                </a:solidFill>
+                <a:latin typeface="楷体"/>
+                <a:ea typeface="楷体"/>
+                <a:cs typeface="楷体"/>
+              </a:rPr>
+              <a:t>单元脉络</a:t>
+            </a:r>
+          </a:p>
+        </p:txBody>
+      </p:sp>
+      <p:sp>
+        <p:nvSpPr>
+          <p:cNvPr id="9" name="TextBox 8"/>
+          <p:cNvSpPr txBox="1"/>
+          <p:nvPr/>
+        </p:nvSpPr>
+        <p:spPr>
+          <a:xfrm>
+            <a:off x="6598767" y="2788920"/>
+            <a:ext cx="4678527" cy="3291840"/>
           </a:xfrm>
           <a:prstGeom prst="rect">
             <a:avLst/>
@@ -8370,40 +9166,68 @@
                 <a:spcPct val="150000"/>
               </a:lnSpc>
               <a:spcAft>
-                <a:spcPts val="1000"/>
+                <a:spcPts val="600"/>
               </a:spcAft>
             </a:pPr>
             <a:r>
-              <a:rPr sz="2200" b="0">
-                <a:solidFill>
-                  <a:srgbClr val="1C2A33"/>
+              <a:rPr sz="1350" b="0">
+                <a:solidFill>
+                  <a:srgbClr val="FFFFFF"/>
                 </a:solidFill>
                 <a:latin typeface="楷体"/>
                 <a:ea typeface="楷体"/>
                 <a:cs typeface="楷体"/>
               </a:rPr>
-              <a:t>本单元主题：化工生产中的重要非金属元素。把今天学到的方法带进下一篇——自己读、自己想、自己写。</a:t>
-            </a:r>
-          </a:p>
-          <a:p>
-            <a:pPr algn="l"/>
-            <a:r>
-              <a:rPr sz="1600" b="1">
-                <a:solidFill>
-                  <a:srgbClr val="B23A2A"/>
-                </a:solidFill>
-                <a:latin typeface="微软雅黑"/>
-                <a:ea typeface="微软雅黑"/>
-                <a:cs typeface="微软雅黑"/>
+              <a:t>· 单元：化工生产中的重要非金属元素</a:t>
+            </a:r>
+          </a:p>
+          <a:p>
+            <a:pPr algn="l">
+              <a:lnSpc>
+                <a:spcPct val="150000"/>
+              </a:lnSpc>
+              <a:spcAft>
+                <a:spcPts val="600"/>
+              </a:spcAft>
+            </a:pPr>
+            <a:r>
+              <a:rPr sz="1350" b="0">
+                <a:solidFill>
+                  <a:srgbClr val="FFFFFF"/>
+                </a:solidFill>
+                <a:latin typeface="楷体"/>
+                <a:ea typeface="楷体"/>
+                <a:cs typeface="楷体"/>
               </a:rPr>
-              <a:t>方法迁移：圈关键信息 → 理事件脉络 → 析人物精神</a:t>
-            </a:r>
-          </a:p>
-        </p:txBody>
-      </p:sp>
-      <p:sp>
-        <p:nvSpPr>
-          <p:cNvPr id="7" name="TextBox 6"/>
+              <a:t>· 本课：硫酸</a:t>
+            </a:r>
+          </a:p>
+          <a:p>
+            <a:pPr algn="l">
+              <a:lnSpc>
+                <a:spcPct val="150000"/>
+              </a:lnSpc>
+              <a:spcAft>
+                <a:spcPts val="600"/>
+              </a:spcAft>
+            </a:pPr>
+            <a:r>
+              <a:rPr sz="1350" b="0">
+                <a:solidFill>
+                  <a:srgbClr val="FFFFFF"/>
+                </a:solidFill>
+                <a:latin typeface="楷体"/>
+                <a:ea typeface="楷体"/>
+                <a:cs typeface="楷体"/>
+              </a:rPr>
+              <a:t>· 后续：氮的氧化物与酸雨</a:t>
+            </a:r>
+          </a:p>
+        </p:txBody>
+      </p:sp>
+      <p:sp>
+        <p:nvSpPr>
+          <p:cNvPr id="10" name="TextBox 9"/>
           <p:cNvSpPr txBox="1"/>
           <p:nvPr/>
         </p:nvSpPr>
